--- a/public/pitch/MyFlove_Pitchdeck_3.4.pptx
+++ b/public/pitch/MyFlove_Pitchdeck_3.4.pptx
@@ -15,6 +15,7 @@
     <p:sldId id="265" r:id="rId16"/>
     <p:sldId id="260" r:id="rId6"/>
     <p:sldId id="261" r:id="rId7"/>
+    <p:sldId id="266" r:id="rId17"/>
     <p:sldId id="262" r:id="rId8"/>
     <p:sldId id="263" r:id="rId9"/>
     <p:sldId id="264" r:id="rId10"/>
@@ -1804,6 +1805,216 @@
 </file>
 
 <file path=ppt/slides/slide10.xml><?xml version="1.0" encoding="utf-8"?>
+<p:sld xmlns:a="http://schemas.openxmlformats.org/drawingml/2006/main" xmlns:r="http://schemas.openxmlformats.org/officeDocument/2006/relationships" xmlns:p="http://schemas.openxmlformats.org/presentationml/2006/main">
+  <p:cSld name="Slide 9">
+    <p:bg>
+      <p:bgPr>
+        <a:solidFill>
+          <a:srgbClr val="241C3B"/>
+        </a:solidFill>
+      </p:bgPr>
+    </p:bg>
+    <p:spTree>
+      <p:nvGrpSpPr>
+        <p:cNvPr id="1" name=""/>
+        <p:cNvGrpSpPr/>
+        <p:nvPr/>
+      </p:nvGrpSpPr>
+      <p:grpSpPr>
+        <a:xfrm>
+          <a:off x="0" y="0"/>
+          <a:ext cx="0" cy="0"/>
+          <a:chOff x="0" y="0"/>
+          <a:chExt cx="0" cy="0"/>
+        </a:xfrm>
+      </p:grpSpPr>
+      <p:sp>
+        <p:nvSpPr>
+          <p:cNvPr id="2" name="Shape 0"/>
+          <p:cNvSpPr/>
+          <p:nvPr/>
+        </p:nvSpPr>
+        <p:spPr>
+          <a:xfrm>
+            <a:off x="-1463040" y="-1737360"/>
+            <a:ext cx="4937760" cy="4937760"/>
+          </a:xfrm>
+          <a:prstGeom prst="ellipse">
+            <a:avLst/>
+          </a:prstGeom>
+          <a:solidFill>
+            <a:srgbClr val="7C5CE0">
+              <a:alpha val="22000"/>
+            </a:srgbClr>
+          </a:solidFill>
+          <a:ln w="12700">
+            <a:solidFill>
+              <a:srgbClr val="241C3B">
+                <a:alpha val="0"/>
+              </a:srgbClr>
+            </a:solidFill>
+            <a:prstDash val="solid"/>
+          </a:ln>
+        </p:spPr>
+        <p:txBody>
+          <a:bodyPr/>
+          <a:p/>
+        </p:txBody>
+      </p:sp>
+      <p:sp>
+        <p:nvSpPr>
+          <p:cNvPr id="3" name="Shape 1"/>
+          <p:cNvSpPr/>
+          <p:nvPr/>
+        </p:nvSpPr>
+        <p:spPr>
+          <a:xfrm>
+            <a:off x="6583680" y="3017520"/>
+            <a:ext cx="3840480" cy="3840480"/>
+          </a:xfrm>
+          <a:prstGeom prst="ellipse">
+            <a:avLst/>
+          </a:prstGeom>
+          <a:solidFill>
+            <a:srgbClr val="F2A8CE">
+              <a:alpha val="14000"/>
+            </a:srgbClr>
+          </a:solidFill>
+          <a:ln w="12700">
+            <a:solidFill>
+              <a:srgbClr val="241C3B">
+                <a:alpha val="0"/>
+              </a:srgbClr>
+            </a:solidFill>
+            <a:prstDash val="solid"/>
+          </a:ln>
+        </p:spPr>
+        <p:txBody>
+          <a:bodyPr/>
+          <a:p/>
+        </p:txBody>
+      </p:sp>
+      <p:sp>
+        <p:nvSpPr>
+          <p:cNvPr id="4" name="Shape 2"/>
+          <p:cNvSpPr/>
+          <p:nvPr/>
+        </p:nvSpPr>
+        <p:spPr>
+          <a:xfrm>
+            <a:off x="685800" y="1143000"/>
+            <a:ext cx="822960" cy="164592"/>
+          </a:xfrm>
+          <a:prstGeom prst="roundRect">
+            <a:avLst>
+              <a:gd name="adj" fmla="val 50000"/>
+            </a:avLst>
+          </a:prstGeom>
+          <a:solidFill>
+            <a:srgbClr val="7C5CE0"/>
+          </a:solidFill>
+          <a:ln w="12700">
+            <a:solidFill>
+              <a:srgbClr val="7C5CE0"/>
+            </a:solidFill>
+            <a:prstDash val="solid"/>
+          </a:ln>
+        </p:spPr>
+        <p:txBody>
+          <a:bodyPr/>
+          <a:p/>
+        </p:txBody>
+      </p:sp>
+      <p:sp>
+        <p:nvSpPr>
+          <p:cNvPr id="5" name="Text 3"/>
+          <p:cNvSpPr/>
+          <p:nvPr/>
+        </p:nvSpPr>
+        <p:spPr>
+          <a:xfrm>
+            <a:off x="640080" y="1828800"/>
+            <a:ext cx="7498080" cy="1280160"/>
+          </a:xfrm>
+          <a:prstGeom prst="rect">
+            <a:avLst/>
+          </a:prstGeom>
+          <a:noFill/>
+          <a:ln/>
+        </p:spPr>
+        <p:txBody>
+          <a:bodyPr wrap="square" rtlCol="0" anchor="ctr"/>
+          <a:lstStyle/>
+          <a:p>
+            <a:pPr indent="0" marL="0">
+              <a:lnSpc>
+                <a:spcPct val="105000"/>
+              </a:lnSpc>
+              <a:buNone/>
+            </a:pPr>
+            <a:r>
+              <a:rPr lang="en-US" sz="3600" b="1" dirty="0">
+                <a:solidFill>
+                  <a:srgbClr val="FFFFFF"/>
+                </a:solidFill>
+                <a:latin typeface="Trebuchet MS" pitchFamily="34" charset="0"/>
+                <a:ea typeface="Trebuchet MS" pitchFamily="34" charset="-122"/>
+                <a:cs typeface="Trebuchet MS" pitchFamily="34" charset="-120"/>
+              </a:rPr>
+              <a:t>Vardagen ska inte kräva att du är någon annan.</a:t>
+            </a:r>
+            <a:endParaRPr lang="en-US" sz="3600" dirty="0"/>
+          </a:p>
+        </p:txBody>
+      </p:sp>
+      <p:sp>
+        <p:nvSpPr>
+          <p:cNvPr id="6" name="Text 4"/>
+          <p:cNvSpPr/>
+          <p:nvPr/>
+        </p:nvSpPr>
+        <p:spPr>
+          <a:xfrm>
+            <a:off x="640080" y="4023360"/>
+            <a:ext cx="7498080" cy="365760"/>
+          </a:xfrm>
+          <a:prstGeom prst="rect">
+            <a:avLst/>
+          </a:prstGeom>
+          <a:noFill/>
+          <a:ln/>
+        </p:spPr>
+        <p:txBody>
+          <a:bodyPr wrap="square" rtlCol="0" anchor="ctr"/>
+          <a:lstStyle/>
+          <a:p>
+            <a:pPr indent="0" marL="0">
+              <a:buNone/>
+            </a:pPr>
+            <a:r>
+              <a:rPr lang="en-US" sz="1500" dirty="0">
+                <a:solidFill>
+                  <a:srgbClr val="A98CF0"/>
+                </a:solidFill>
+                <a:latin typeface="Calibri" pitchFamily="34" charset="0"/>
+                <a:ea typeface="Calibri" pitchFamily="34" charset="-122"/>
+                <a:cs typeface="Calibri" pitchFamily="34" charset="-120"/>
+              </a:rPr>
+              <a:t>MyFlove  ·  myflove.lovable.app  ·  [KONTAKT – fyll i]</a:t>
+            </a:r>
+            <a:endParaRPr lang="en-US" sz="1500" dirty="0"/>
+          </a:p>
+        </p:txBody>
+      </p:sp>
+    </p:spTree>
+  </p:cSld>
+  <p:clrMapOvr>
+    <a:masterClrMapping/>
+  </p:clrMapOvr>
+</p:sld>
+</file>
+
+<file path=ppt/slides/slide11.xml><?xml version="1.0" encoding="utf-8"?>
 <p:sld xmlns:a="http://schemas.openxmlformats.org/drawingml/2006/main" xmlns:p="http://schemas.openxmlformats.org/presentationml/2006/main" xmlns:r="http://schemas.openxmlformats.org/officeDocument/2006/relationships">
   <p:cSld>
     <p:bg>
@@ -1823,154 +2034,24 @@
       <p:grpSpPr/>
       <p:sp>
         <p:nvSpPr>
-          <p:cNvPr id="2" name="TextBox 1"/>
-          <p:cNvSpPr txBox="1"/>
-          <p:nvPr/>
-        </p:nvSpPr>
-        <p:spPr>
-          <a:xfrm>
-            <a:off x="640080" y="457200"/>
-            <a:ext cx="7863840" cy="320040"/>
-          </a:xfrm>
-          <a:prstGeom prst="rect">
-            <a:avLst/>
-          </a:prstGeom>
-          <a:noFill/>
-        </p:spPr>
-        <p:txBody>
-          <a:bodyPr wrap="square">
-            <a:spAutoFit/>
-          </a:bodyPr>
-          <a:lstStyle/>
-          <a:p>
-            <a:pPr algn="l"/>
-            <a:r>
-              <a:rPr sz="1300" b="1">
-                <a:solidFill>
-                  <a:srgbClr val="7C5CE0"/>
-                </a:solidFill>
-                <a:latin typeface="Calibri"/>
-              </a:rPr>
-              <a:t>FLOW 2.0</a:t>
-            </a:r>
-          </a:p>
-        </p:txBody>
-      </p:sp>
-      <p:sp>
-        <p:nvSpPr>
-          <p:cNvPr id="3" name="TextBox 2"/>
-          <p:cNvSpPr txBox="1"/>
-          <p:nvPr/>
-        </p:nvSpPr>
-        <p:spPr>
-          <a:xfrm>
-            <a:off x="640080" y="822960"/>
-            <a:ext cx="5200000" cy="1097280"/>
-          </a:xfrm>
-          <a:prstGeom prst="rect">
-            <a:avLst/>
-          </a:prstGeom>
-          <a:noFill/>
-        </p:spPr>
-        <p:txBody>
-          <a:bodyPr wrap="square">
-            <a:spAutoFit/>
-          </a:bodyPr>
-          <a:lstStyle/>
-          <a:p>
-            <a:pPr algn="l"/>
-            <a:r>
-              <a:rPr sz="3200" b="1">
-                <a:solidFill>
-                  <a:srgbClr val="241C3B"/>
-                </a:solidFill>
-                <a:latin typeface="Trebuchet MS"/>
-              </a:rPr>
-              <a:t>Följeslagaren som gör appen mänsklig</a:t>
-            </a:r>
-          </a:p>
-        </p:txBody>
-      </p:sp>
-      <p:sp>
-        <p:nvSpPr>
-          <p:cNvPr id="4" name="TextBox 3"/>
-          <p:cNvSpPr txBox="1"/>
-          <p:nvPr/>
-        </p:nvSpPr>
-        <p:spPr>
-          <a:xfrm>
-            <a:off x="640080" y="1850000"/>
-            <a:ext cx="4900000" cy="700000"/>
-          </a:xfrm>
-          <a:prstGeom prst="rect">
-            <a:avLst/>
-          </a:prstGeom>
-          <a:noFill/>
-        </p:spPr>
-        <p:txBody>
-          <a:bodyPr wrap="square">
-            <a:spAutoFit/>
-          </a:bodyPr>
-          <a:lstStyle/>
-          <a:p>
-            <a:pPr algn="l"/>
-            <a:r>
-              <a:rPr sz="1300" b="0">
-                <a:solidFill>
-                  <a:srgbClr val="6F6789"/>
-                </a:solidFill>
-                <a:latin typeface="Calibri"/>
-              </a:rPr>
-              <a:t>Flow är MyFloves röst och ansikte – en levande figur som reagerar på energi, väder, medicin och dagens plan. En sak i taget, aldrig skäll.</a:t>
-            </a:r>
-          </a:p>
-        </p:txBody>
-      </p:sp>
-      <p:pic>
-        <p:nvPicPr>
-          <p:cNvPr id="5" name="Picture 4" descr="flow-mascot.png"/>
-          <p:cNvPicPr>
-            <a:picLocks noChangeAspect="1"/>
-          </p:cNvPicPr>
-          <p:nvPr/>
-        </p:nvPicPr>
-        <p:blipFill>
-          <a:blip r:embed="rId2"/>
-          <a:stretch>
-            <a:fillRect/>
-          </a:stretch>
-        </p:blipFill>
-        <p:spPr>
-          <a:xfrm>
-            <a:off x="5750000" y="1150000"/>
-            <a:ext cx="3626645" cy="2450000"/>
-          </a:xfrm>
-          <a:prstGeom prst="rect">
-            <a:avLst/>
-          </a:prstGeom>
-        </p:spPr>
-      </p:pic>
-      <p:sp>
-        <p:nvSpPr>
-          <p:cNvPr id="6" name="Rounded Rectangle 5"/>
-          <p:cNvSpPr/>
-          <p:nvPr/>
-        </p:nvSpPr>
-        <p:spPr>
-          <a:xfrm>
-            <a:off x="640080" y="2900000"/>
-            <a:ext cx="2423160" cy="1750000"/>
-          </a:xfrm>
-          <a:prstGeom prst="roundRect">
-            <a:avLst/>
-          </a:prstGeom>
-          <a:solidFill>
-            <a:srgbClr val="FFFFFF"/>
+          <p:cNvPr id="2" name="Oval 1"/>
+          <p:cNvSpPr/>
+          <p:nvPr/>
+        </p:nvSpPr>
+        <p:spPr>
+          <a:xfrm>
+            <a:off x="6949440" y="-1280160"/>
+            <a:ext cx="4023360" cy="4023360"/>
+          </a:xfrm>
+          <a:prstGeom prst="ellipse">
+            <a:avLst/>
+          </a:prstGeom>
+          <a:solidFill>
+            <a:srgbClr val="A98CF0"/>
           </a:solidFill>
           <a:ln>
             <a:noFill/>
           </a:ln>
-          <a:effectLst/>
         </p:spPr>
         <p:style>
           <a:lnRef idx="1">
@@ -1996,25 +2077,24 @@
       </p:sp>
       <p:sp>
         <p:nvSpPr>
-          <p:cNvPr id="7" name="Rounded Rectangle 6"/>
-          <p:cNvSpPr/>
-          <p:nvPr/>
-        </p:nvSpPr>
-        <p:spPr>
-          <a:xfrm>
-            <a:off x="868680" y="3128600"/>
-            <a:ext cx="411480" cy="109728"/>
-          </a:xfrm>
-          <a:prstGeom prst="roundRect">
-            <a:avLst/>
-          </a:prstGeom>
-          <a:solidFill>
-            <a:srgbClr val="7C5CE0"/>
+          <p:cNvPr id="3" name="Oval 2"/>
+          <p:cNvSpPr/>
+          <p:nvPr/>
+        </p:nvSpPr>
+        <p:spPr>
+          <a:xfrm>
+            <a:off x="-1280160" y="3200400"/>
+            <a:ext cx="3200400" cy="3200400"/>
+          </a:xfrm>
+          <a:prstGeom prst="ellipse">
+            <a:avLst/>
+          </a:prstGeom>
+          <a:solidFill>
+            <a:srgbClr val="F2A8CE"/>
           </a:solidFill>
           <a:ln>
             <a:noFill/>
           </a:ln>
-          <a:effectLst/>
         </p:spPr>
         <p:style>
           <a:lnRef idx="1">
@@ -2040,84 +2120,82 @@
       </p:sp>
       <p:sp>
         <p:nvSpPr>
-          <p:cNvPr id="8" name="TextBox 7"/>
+          <p:cNvPr id="4" name="TextBox 3"/>
           <p:cNvSpPr txBox="1"/>
           <p:nvPr/>
         </p:nvSpPr>
         <p:spPr>
           <a:xfrm>
-            <a:off x="868680" y="3380000"/>
-            <a:ext cx="1965960" cy="400000"/>
-          </a:xfrm>
-          <a:prstGeom prst="rect">
-            <a:avLst/>
-          </a:prstGeom>
-          <a:noFill/>
-        </p:spPr>
-        <p:txBody>
-          <a:bodyPr wrap="square">
+            <a:off x="640080" y="457200"/>
+            <a:ext cx="7863840" cy="320040"/>
+          </a:xfrm>
+          <a:prstGeom prst="rect">
+            <a:avLst/>
+          </a:prstGeom>
+          <a:noFill/>
+        </p:spPr>
+        <p:txBody>
+          <a:bodyPr wrap="square" lIns="0" rIns="0" tIns="0" bIns="0" anchor="t">
             <a:spAutoFit/>
           </a:bodyPr>
           <a:lstStyle/>
           <a:p>
-            <a:pPr algn="l"/>
-            <a:r>
-              <a:rPr sz="1600" b="1">
-                <a:solidFill>
-                  <a:srgbClr val="241C3B"/>
-                </a:solidFill>
-                <a:latin typeface="Trebuchet MS"/>
-              </a:rPr>
-              <a:t>12 lägen</a:t>
-            </a:r>
-          </a:p>
-        </p:txBody>
-      </p:sp>
-      <p:sp>
-        <p:nvSpPr>
-          <p:cNvPr id="9" name="TextBox 8"/>
+            <a:r>
+              <a:rPr sz="1300" b="1" spc="600">
+                <a:solidFill>
+                  <a:srgbClr val="7C5CE0"/>
+                </a:solidFill>
+                <a:latin typeface="Calibri"/>
+              </a:rPr>
+              <a:t>MARKNADEN · MARKET OPPORTUNITY</a:t>
+            </a:r>
+          </a:p>
+        </p:txBody>
+      </p:sp>
+      <p:sp>
+        <p:nvSpPr>
+          <p:cNvPr id="5" name="TextBox 4"/>
           <p:cNvSpPr txBox="1"/>
           <p:nvPr/>
         </p:nvSpPr>
         <p:spPr>
           <a:xfrm>
-            <a:off x="868680" y="3750000"/>
-            <a:ext cx="1965960" cy="750000"/>
-          </a:xfrm>
-          <a:prstGeom prst="rect">
-            <a:avLst/>
-          </a:prstGeom>
-          <a:noFill/>
-        </p:spPr>
-        <p:txBody>
-          <a:bodyPr wrap="square">
+            <a:off x="640080" y="822960"/>
+            <a:ext cx="7863840" cy="1000000"/>
+          </a:xfrm>
+          <a:prstGeom prst="rect">
+            <a:avLst/>
+          </a:prstGeom>
+          <a:noFill/>
+        </p:spPr>
+        <p:txBody>
+          <a:bodyPr wrap="square" lIns="0" rIns="0" tIns="0" bIns="0" anchor="t">
             <a:spAutoFit/>
           </a:bodyPr>
           <a:lstStyle/>
           <a:p>
-            <a:pPr algn="l"/>
-            <a:r>
-              <a:rPr sz="1200" b="0">
-                <a:solidFill>
-                  <a:srgbClr val="6F6789"/>
-                </a:solidFill>
-                <a:latin typeface="Calibri"/>
-              </a:rPr>
-              <a:t>Regn, sömn, paus, studier, jobb, städ, mat, resa, låg/hög energi, klart, återhämtning.</a:t>
-            </a:r>
-          </a:p>
-        </p:txBody>
-      </p:sp>
-      <p:sp>
-        <p:nvSpPr>
-          <p:cNvPr id="10" name="Rounded Rectangle 9"/>
-          <p:cNvSpPr/>
-          <p:nvPr/>
-        </p:nvSpPr>
-        <p:spPr>
-          <a:xfrm>
-            <a:off x="3337560" y="2900000"/>
-            <a:ext cx="2423160" cy="1750000"/>
+            <a:r>
+              <a:rPr sz="3000" b="1">
+                <a:solidFill>
+                  <a:srgbClr val="241C3B"/>
+                </a:solidFill>
+                <a:latin typeface="Trebuchet MS"/>
+              </a:rPr>
+              <a:t>En stor, växande målgrupp – och en marknad som skalar</a:t>
+            </a:r>
+          </a:p>
+        </p:txBody>
+      </p:sp>
+      <p:sp>
+        <p:nvSpPr>
+          <p:cNvPr id="6" name="Rounded Rectangle 5"/>
+          <p:cNvSpPr/>
+          <p:nvPr/>
+        </p:nvSpPr>
+        <p:spPr>
+          <a:xfrm>
+            <a:off x="640080" y="2011680"/>
+            <a:ext cx="2423160" cy="1280160"/>
           </a:xfrm>
           <a:prstGeom prst="roundRect">
             <a:avLst/>
@@ -2154,20 +2232,20 @@
       </p:sp>
       <p:sp>
         <p:nvSpPr>
-          <p:cNvPr id="11" name="Rounded Rectangle 10"/>
-          <p:cNvSpPr/>
-          <p:nvPr/>
-        </p:nvSpPr>
-        <p:spPr>
-          <a:xfrm>
-            <a:off x="3566160" y="3128600"/>
-            <a:ext cx="411480" cy="109728"/>
+          <p:cNvPr id="7" name="Rounded Rectangle 6"/>
+          <p:cNvSpPr/>
+          <p:nvPr/>
+        </p:nvSpPr>
+        <p:spPr>
+          <a:xfrm>
+            <a:off x="868680" y="2194560"/>
+            <a:ext cx="411480" cy="91440"/>
           </a:xfrm>
           <a:prstGeom prst="roundRect">
             <a:avLst/>
           </a:prstGeom>
           <a:solidFill>
-            <a:srgbClr val="A98CF0"/>
+            <a:srgbClr val="7C5CE0"/>
           </a:solidFill>
           <a:ln>
             <a:noFill/>
@@ -2198,84 +2276,116 @@
       </p:sp>
       <p:sp>
         <p:nvSpPr>
-          <p:cNvPr id="12" name="TextBox 11"/>
+          <p:cNvPr id="8" name="TextBox 7"/>
           <p:cNvSpPr txBox="1"/>
           <p:nvPr/>
         </p:nvSpPr>
         <p:spPr>
           <a:xfrm>
-            <a:off x="3566160" y="3380000"/>
-            <a:ext cx="1965960" cy="400000"/>
-          </a:xfrm>
-          <a:prstGeom prst="rect">
-            <a:avLst/>
-          </a:prstGeom>
-          <a:noFill/>
-        </p:spPr>
-        <p:txBody>
-          <a:bodyPr wrap="square">
+            <a:off x="868680" y="2346960"/>
+            <a:ext cx="1965960" cy="320040"/>
+          </a:xfrm>
+          <a:prstGeom prst="rect">
+            <a:avLst/>
+          </a:prstGeom>
+          <a:noFill/>
+        </p:spPr>
+        <p:txBody>
+          <a:bodyPr wrap="square" lIns="0" rIns="0" tIns="0" bIns="0" anchor="t">
             <a:spAutoFit/>
           </a:bodyPr>
           <a:lstStyle/>
           <a:p>
-            <a:pPr algn="l"/>
-            <a:r>
-              <a:rPr sz="1600" b="1">
+            <a:r>
+              <a:rPr sz="2400" b="1">
                 <a:solidFill>
                   <a:srgbClr val="241C3B"/>
                 </a:solidFill>
                 <a:latin typeface="Trebuchet MS"/>
               </a:rPr>
-              <a:t>I hela appen</a:t>
-            </a:r>
-          </a:p>
-        </p:txBody>
-      </p:sp>
-      <p:sp>
-        <p:nvSpPr>
-          <p:cNvPr id="13" name="TextBox 12"/>
+              <a:t>140M+</a:t>
+            </a:r>
+          </a:p>
+        </p:txBody>
+      </p:sp>
+      <p:sp>
+        <p:nvSpPr>
+          <p:cNvPr id="9" name="TextBox 8"/>
           <p:cNvSpPr txBox="1"/>
           <p:nvPr/>
         </p:nvSpPr>
         <p:spPr>
           <a:xfrm>
-            <a:off x="3566160" y="3750000"/>
-            <a:ext cx="1965960" cy="750000"/>
-          </a:xfrm>
-          <a:prstGeom prst="rect">
-            <a:avLst/>
-          </a:prstGeom>
-          <a:noFill/>
-        </p:spPr>
-        <p:txBody>
-          <a:bodyPr wrap="square">
+            <a:off x="868680" y="2667000"/>
+            <a:ext cx="1965960" cy="220000"/>
+          </a:xfrm>
+          <a:prstGeom prst="rect">
+            <a:avLst/>
+          </a:prstGeom>
+          <a:noFill/>
+        </p:spPr>
+        <p:txBody>
+          <a:bodyPr wrap="square" lIns="0" rIns="0" tIns="0" bIns="0" anchor="t">
             <a:spAutoFit/>
           </a:bodyPr>
           <a:lstStyle/>
           <a:p>
-            <a:pPr algn="l"/>
-            <a:r>
-              <a:rPr sz="1200" b="0">
+            <a:r>
+              <a:rPr sz="1100" b="1">
+                <a:solidFill>
+                  <a:srgbClr val="7C5CE0"/>
+                </a:solidFill>
+                <a:latin typeface="Calibri"/>
+              </a:rPr>
+              <a:t>vuxna globalt</a:t>
+            </a:r>
+          </a:p>
+        </p:txBody>
+      </p:sp>
+      <p:sp>
+        <p:nvSpPr>
+          <p:cNvPr id="10" name="TextBox 9"/>
+          <p:cNvSpPr txBox="1"/>
+          <p:nvPr/>
+        </p:nvSpPr>
+        <p:spPr>
+          <a:xfrm>
+            <a:off x="868680" y="2861680"/>
+            <a:ext cx="1965960" cy="380000"/>
+          </a:xfrm>
+          <a:prstGeom prst="rect">
+            <a:avLst/>
+          </a:prstGeom>
+          <a:noFill/>
+        </p:spPr>
+        <p:txBody>
+          <a:bodyPr wrap="square" lIns="0" rIns="0" tIns="0" bIns="0" anchor="t">
+            <a:spAutoFit/>
+          </a:bodyPr>
+          <a:lstStyle/>
+          <a:p>
+            <a:r>
+              <a:rPr sz="900" b="0">
                 <a:solidFill>
                   <a:srgbClr val="6F6789"/>
                 </a:solidFill>
                 <a:latin typeface="Calibri"/>
               </a:rPr>
-              <a:t>Stor på Hem och Min dag, liten följeslagare i övriga vyer – och i Flow-previewen.</a:t>
-            </a:r>
-          </a:p>
-        </p:txBody>
-      </p:sp>
-      <p:sp>
-        <p:nvSpPr>
-          <p:cNvPr id="14" name="Rounded Rectangle 13"/>
-          <p:cNvSpPr/>
-          <p:nvPr/>
-        </p:nvSpPr>
-        <p:spPr>
-          <a:xfrm>
-            <a:off x="6035040" y="2900000"/>
-            <a:ext cx="2423160" cy="1750000"/>
+              <a:t>Vuxna med kvarstående ADHD (2,58 % av vuxna, ca 139,8 miljoner). Global systematisk översikt.</a:t>
+            </a:r>
+          </a:p>
+        </p:txBody>
+      </p:sp>
+      <p:sp>
+        <p:nvSpPr>
+          <p:cNvPr id="11" name="Rounded Rectangle 10"/>
+          <p:cNvSpPr/>
+          <p:nvPr/>
+        </p:nvSpPr>
+        <p:spPr>
+          <a:xfrm>
+            <a:off x="3337560" y="2011680"/>
+            <a:ext cx="2423160" cy="1280160"/>
           </a:xfrm>
           <a:prstGeom prst="roundRect">
             <a:avLst/>
@@ -2312,20 +2422,20 @@
       </p:sp>
       <p:sp>
         <p:nvSpPr>
-          <p:cNvPr id="15" name="Rounded Rectangle 14"/>
-          <p:cNvSpPr/>
-          <p:nvPr/>
-        </p:nvSpPr>
-        <p:spPr>
-          <a:xfrm>
-            <a:off x="6263640" y="3128600"/>
-            <a:ext cx="411480" cy="109728"/>
+          <p:cNvPr id="12" name="Rounded Rectangle 11"/>
+          <p:cNvSpPr/>
+          <p:nvPr/>
+        </p:nvSpPr>
+        <p:spPr>
+          <a:xfrm>
+            <a:off x="3566160" y="2194560"/>
+            <a:ext cx="411480" cy="91440"/>
           </a:xfrm>
           <a:prstGeom prst="roundRect">
             <a:avLst/>
           </a:prstGeom>
           <a:solidFill>
-            <a:srgbClr val="F2A8CE"/>
+            <a:srgbClr val="A98CF0"/>
           </a:solidFill>
           <a:ln>
             <a:noFill/>
@@ -2356,70 +2466,964 @@
       </p:sp>
       <p:sp>
         <p:nvSpPr>
-          <p:cNvPr id="16" name="TextBox 15"/>
+          <p:cNvPr id="13" name="TextBox 12"/>
           <p:cNvSpPr txBox="1"/>
           <p:nvPr/>
         </p:nvSpPr>
         <p:spPr>
           <a:xfrm>
-            <a:off x="6263640" y="3380000"/>
-            <a:ext cx="1965960" cy="400000"/>
-          </a:xfrm>
-          <a:prstGeom prst="rect">
-            <a:avLst/>
-          </a:prstGeom>
-          <a:noFill/>
-        </p:spPr>
-        <p:txBody>
-          <a:bodyPr wrap="square">
+            <a:off x="3566160" y="2346960"/>
+            <a:ext cx="1965960" cy="320040"/>
+          </a:xfrm>
+          <a:prstGeom prst="rect">
+            <a:avLst/>
+          </a:prstGeom>
+          <a:noFill/>
+        </p:spPr>
+        <p:txBody>
+          <a:bodyPr wrap="square" lIns="0" rIns="0" tIns="0" bIns="0" anchor="t">
             <a:spAutoFit/>
           </a:bodyPr>
           <a:lstStyle/>
           <a:p>
-            <a:pPr algn="l"/>
-            <a:r>
-              <a:rPr sz="1600" b="1">
+            <a:r>
+              <a:rPr sz="2400" b="1">
                 <a:solidFill>
                   <a:srgbClr val="241C3B"/>
                 </a:solidFill>
                 <a:latin typeface="Trebuchet MS"/>
               </a:rPr>
-              <a:t>Kännbar</a:t>
-            </a:r>
-          </a:p>
-        </p:txBody>
-      </p:sp>
-      <p:sp>
-        <p:nvSpPr>
-          <p:cNvPr id="17" name="TextBox 16"/>
+              <a:t>~3 %</a:t>
+            </a:r>
+          </a:p>
+        </p:txBody>
+      </p:sp>
+      <p:sp>
+        <p:nvSpPr>
+          <p:cNvPr id="14" name="TextBox 13"/>
           <p:cNvSpPr txBox="1"/>
           <p:nvPr/>
         </p:nvSpPr>
         <p:spPr>
           <a:xfrm>
-            <a:off x="6263640" y="3750000"/>
-            <a:ext cx="1965960" cy="750000"/>
-          </a:xfrm>
-          <a:prstGeom prst="rect">
-            <a:avLst/>
-          </a:prstGeom>
-          <a:noFill/>
-        </p:spPr>
-        <p:txBody>
-          <a:bodyPr wrap="square">
+            <a:off x="3566160" y="2667000"/>
+            <a:ext cx="1965960" cy="220000"/>
+          </a:xfrm>
+          <a:prstGeom prst="rect">
+            <a:avLst/>
+          </a:prstGeom>
+          <a:noFill/>
+        </p:spPr>
+        <p:txBody>
+          <a:bodyPr wrap="square" lIns="0" rIns="0" tIns="0" bIns="0" anchor="t">
             <a:spAutoFit/>
           </a:bodyPr>
           <a:lstStyle/>
           <a:p>
-            <a:pPr algn="l"/>
-            <a:r>
-              <a:rPr sz="1200" b="0">
+            <a:r>
+              <a:rPr sz="1100" b="1">
+                <a:solidFill>
+                  <a:srgbClr val="A98CF0"/>
+                </a:solidFill>
+                <a:latin typeface="Calibri"/>
+              </a:rPr>
+              <a:t>av vuxna i Sverige</a:t>
+            </a:r>
+          </a:p>
+        </p:txBody>
+      </p:sp>
+      <p:sp>
+        <p:nvSpPr>
+          <p:cNvPr id="15" name="TextBox 14"/>
+          <p:cNvSpPr txBox="1"/>
+          <p:nvPr/>
+        </p:nvSpPr>
+        <p:spPr>
+          <a:xfrm>
+            <a:off x="3566160" y="2861680"/>
+            <a:ext cx="1965960" cy="380000"/>
+          </a:xfrm>
+          <a:prstGeom prst="rect">
+            <a:avLst/>
+          </a:prstGeom>
+          <a:noFill/>
+        </p:spPr>
+        <p:txBody>
+          <a:bodyPr wrap="square" lIns="0" rIns="0" tIns="0" bIns="0" anchor="t">
+            <a:spAutoFit/>
+          </a:bodyPr>
+          <a:lstStyle/>
+          <a:p>
+            <a:r>
+              <a:rPr sz="900" b="0">
                 <a:solidFill>
                   <a:srgbClr val="6F6789"/>
                 </a:solidFill>
                 <a:latin typeface="Calibri"/>
               </a:rPr>
-              <a:t>Haptisk återkoppling vid byte och avklarat – tyst läge och reducerad rörelse respekteras.</a:t>
+              <a:t>Socialstyrelsen anger att cirka 3 % av vuxna i Sverige har ADHD.</a:t>
+            </a:r>
+          </a:p>
+        </p:txBody>
+      </p:sp>
+      <p:sp>
+        <p:nvSpPr>
+          <p:cNvPr id="16" name="Rounded Rectangle 15"/>
+          <p:cNvSpPr/>
+          <p:nvPr/>
+        </p:nvSpPr>
+        <p:spPr>
+          <a:xfrm>
+            <a:off x="6035040" y="2011680"/>
+            <a:ext cx="2423160" cy="1280160"/>
+          </a:xfrm>
+          <a:prstGeom prst="roundRect">
+            <a:avLst/>
+          </a:prstGeom>
+          <a:solidFill>
+            <a:srgbClr val="FFFFFF"/>
+          </a:solidFill>
+          <a:ln>
+            <a:noFill/>
+          </a:ln>
+          <a:effectLst/>
+        </p:spPr>
+        <p:style>
+          <a:lnRef idx="1">
+            <a:schemeClr val="accent1"/>
+          </a:lnRef>
+          <a:fillRef idx="3">
+            <a:schemeClr val="accent1"/>
+          </a:fillRef>
+          <a:effectRef idx="2">
+            <a:schemeClr val="accent1"/>
+          </a:effectRef>
+          <a:fontRef idx="minor">
+            <a:schemeClr val="lt1"/>
+          </a:fontRef>
+        </p:style>
+        <p:txBody>
+          <a:bodyPr rtlCol="0" anchor="ctr"/>
+          <a:lstStyle/>
+          <a:p>
+            <a:pPr algn="ctr"/>
+          </a:p>
+        </p:txBody>
+      </p:sp>
+      <p:sp>
+        <p:nvSpPr>
+          <p:cNvPr id="17" name="Rounded Rectangle 16"/>
+          <p:cNvSpPr/>
+          <p:nvPr/>
+        </p:nvSpPr>
+        <p:spPr>
+          <a:xfrm>
+            <a:off x="6263640" y="2194560"/>
+            <a:ext cx="411480" cy="91440"/>
+          </a:xfrm>
+          <a:prstGeom prst="roundRect">
+            <a:avLst/>
+          </a:prstGeom>
+          <a:solidFill>
+            <a:srgbClr val="F2A8CE"/>
+          </a:solidFill>
+          <a:ln>
+            <a:noFill/>
+          </a:ln>
+          <a:effectLst/>
+        </p:spPr>
+        <p:style>
+          <a:lnRef idx="1">
+            <a:schemeClr val="accent1"/>
+          </a:lnRef>
+          <a:fillRef idx="3">
+            <a:schemeClr val="accent1"/>
+          </a:fillRef>
+          <a:effectRef idx="2">
+            <a:schemeClr val="accent1"/>
+          </a:effectRef>
+          <a:fontRef idx="minor">
+            <a:schemeClr val="lt1"/>
+          </a:fontRef>
+        </p:style>
+        <p:txBody>
+          <a:bodyPr rtlCol="0" anchor="ctr"/>
+          <a:lstStyle/>
+          <a:p>
+            <a:pPr algn="ctr"/>
+          </a:p>
+        </p:txBody>
+      </p:sp>
+      <p:sp>
+        <p:nvSpPr>
+          <p:cNvPr id="18" name="TextBox 17"/>
+          <p:cNvSpPr txBox="1"/>
+          <p:nvPr/>
+        </p:nvSpPr>
+        <p:spPr>
+          <a:xfrm>
+            <a:off x="6263640" y="2346960"/>
+            <a:ext cx="1965960" cy="320040"/>
+          </a:xfrm>
+          <a:prstGeom prst="rect">
+            <a:avLst/>
+          </a:prstGeom>
+          <a:noFill/>
+        </p:spPr>
+        <p:txBody>
+          <a:bodyPr wrap="square" lIns="0" rIns="0" tIns="0" bIns="0" anchor="t">
+            <a:spAutoFit/>
+          </a:bodyPr>
+          <a:lstStyle/>
+          <a:p>
+            <a:r>
+              <a:rPr sz="2400" b="1">
+                <a:solidFill>
+                  <a:srgbClr val="241C3B"/>
+                </a:solidFill>
+                <a:latin typeface="Trebuchet MS"/>
+              </a:rPr>
+              <a:t>$3,06B</a:t>
+            </a:r>
+          </a:p>
+        </p:txBody>
+      </p:sp>
+      <p:sp>
+        <p:nvSpPr>
+          <p:cNvPr id="19" name="TextBox 18"/>
+          <p:cNvSpPr txBox="1"/>
+          <p:nvPr/>
+        </p:nvSpPr>
+        <p:spPr>
+          <a:xfrm>
+            <a:off x="6263640" y="2667000"/>
+            <a:ext cx="1965960" cy="220000"/>
+          </a:xfrm>
+          <a:prstGeom prst="rect">
+            <a:avLst/>
+          </a:prstGeom>
+          <a:noFill/>
+        </p:spPr>
+        <p:txBody>
+          <a:bodyPr wrap="square" lIns="0" rIns="0" tIns="0" bIns="0" anchor="t">
+            <a:spAutoFit/>
+          </a:bodyPr>
+          <a:lstStyle/>
+          <a:p>
+            <a:r>
+              <a:rPr sz="1100" b="1">
+                <a:solidFill>
+                  <a:srgbClr val="6F6789"/>
+                </a:solidFill>
+                <a:latin typeface="Calibri"/>
+              </a:rPr>
+              <a:t>digital hälsa 2025</a:t>
+            </a:r>
+          </a:p>
+        </p:txBody>
+      </p:sp>
+      <p:sp>
+        <p:nvSpPr>
+          <p:cNvPr id="20" name="TextBox 19"/>
+          <p:cNvSpPr txBox="1"/>
+          <p:nvPr/>
+        </p:nvSpPr>
+        <p:spPr>
+          <a:xfrm>
+            <a:off x="6263640" y="2861680"/>
+            <a:ext cx="1965960" cy="380000"/>
+          </a:xfrm>
+          <a:prstGeom prst="rect">
+            <a:avLst/>
+          </a:prstGeom>
+          <a:noFill/>
+        </p:spPr>
+        <p:txBody>
+          <a:bodyPr wrap="square" lIns="0" rIns="0" tIns="0" bIns="0" anchor="t">
+            <a:spAutoFit/>
+          </a:bodyPr>
+          <a:lstStyle/>
+          <a:p>
+            <a:r>
+              <a:rPr sz="900" b="0">
+                <a:solidFill>
+                  <a:srgbClr val="6F6789"/>
+                </a:solidFill>
+                <a:latin typeface="Calibri"/>
+              </a:rPr>
+              <a:t>Uppskattad global digital-health-marknad för neurodivergenta användare 2025.</a:t>
+            </a:r>
+          </a:p>
+        </p:txBody>
+      </p:sp>
+      <p:sp>
+        <p:nvSpPr>
+          <p:cNvPr id="21" name="Rounded Rectangle 20"/>
+          <p:cNvSpPr/>
+          <p:nvPr/>
+        </p:nvSpPr>
+        <p:spPr>
+          <a:xfrm>
+            <a:off x="640080" y="3383280"/>
+            <a:ext cx="2423160" cy="1280160"/>
+          </a:xfrm>
+          <a:prstGeom prst="roundRect">
+            <a:avLst/>
+          </a:prstGeom>
+          <a:solidFill>
+            <a:srgbClr val="FFFFFF"/>
+          </a:solidFill>
+          <a:ln>
+            <a:noFill/>
+          </a:ln>
+          <a:effectLst/>
+        </p:spPr>
+        <p:style>
+          <a:lnRef idx="1">
+            <a:schemeClr val="accent1"/>
+          </a:lnRef>
+          <a:fillRef idx="3">
+            <a:schemeClr val="accent1"/>
+          </a:fillRef>
+          <a:effectRef idx="2">
+            <a:schemeClr val="accent1"/>
+          </a:effectRef>
+          <a:fontRef idx="minor">
+            <a:schemeClr val="lt1"/>
+          </a:fontRef>
+        </p:style>
+        <p:txBody>
+          <a:bodyPr rtlCol="0" anchor="ctr"/>
+          <a:lstStyle/>
+          <a:p>
+            <a:pPr algn="ctr"/>
+          </a:p>
+        </p:txBody>
+      </p:sp>
+      <p:sp>
+        <p:nvSpPr>
+          <p:cNvPr id="22" name="Rounded Rectangle 21"/>
+          <p:cNvSpPr/>
+          <p:nvPr/>
+        </p:nvSpPr>
+        <p:spPr>
+          <a:xfrm>
+            <a:off x="868680" y="3566160"/>
+            <a:ext cx="411480" cy="91440"/>
+          </a:xfrm>
+          <a:prstGeom prst="roundRect">
+            <a:avLst/>
+          </a:prstGeom>
+          <a:solidFill>
+            <a:srgbClr val="7C5CE0"/>
+          </a:solidFill>
+          <a:ln>
+            <a:noFill/>
+          </a:ln>
+          <a:effectLst/>
+        </p:spPr>
+        <p:style>
+          <a:lnRef idx="1">
+            <a:schemeClr val="accent1"/>
+          </a:lnRef>
+          <a:fillRef idx="3">
+            <a:schemeClr val="accent1"/>
+          </a:fillRef>
+          <a:effectRef idx="2">
+            <a:schemeClr val="accent1"/>
+          </a:effectRef>
+          <a:fontRef idx="minor">
+            <a:schemeClr val="lt1"/>
+          </a:fontRef>
+        </p:style>
+        <p:txBody>
+          <a:bodyPr rtlCol="0" anchor="ctr"/>
+          <a:lstStyle/>
+          <a:p>
+            <a:pPr algn="ctr"/>
+          </a:p>
+        </p:txBody>
+      </p:sp>
+      <p:sp>
+        <p:nvSpPr>
+          <p:cNvPr id="23" name="TextBox 22"/>
+          <p:cNvSpPr txBox="1"/>
+          <p:nvPr/>
+        </p:nvSpPr>
+        <p:spPr>
+          <a:xfrm>
+            <a:off x="868680" y="3718560"/>
+            <a:ext cx="1965960" cy="320040"/>
+          </a:xfrm>
+          <a:prstGeom prst="rect">
+            <a:avLst/>
+          </a:prstGeom>
+          <a:noFill/>
+        </p:spPr>
+        <p:txBody>
+          <a:bodyPr wrap="square" lIns="0" rIns="0" tIns="0" bIns="0" anchor="t">
+            <a:spAutoFit/>
+          </a:bodyPr>
+          <a:lstStyle/>
+          <a:p>
+            <a:r>
+              <a:rPr sz="2400" b="1">
+                <a:solidFill>
+                  <a:srgbClr val="241C3B"/>
+                </a:solidFill>
+                <a:latin typeface="Trebuchet MS"/>
+              </a:rPr>
+              <a:t>$1,9B</a:t>
+            </a:r>
+          </a:p>
+        </p:txBody>
+      </p:sp>
+      <p:sp>
+        <p:nvSpPr>
+          <p:cNvPr id="24" name="TextBox 23"/>
+          <p:cNvSpPr txBox="1"/>
+          <p:nvPr/>
+        </p:nvSpPr>
+        <p:spPr>
+          <a:xfrm>
+            <a:off x="868680" y="4038600"/>
+            <a:ext cx="1965960" cy="220000"/>
+          </a:xfrm>
+          <a:prstGeom prst="rect">
+            <a:avLst/>
+          </a:prstGeom>
+          <a:noFill/>
+        </p:spPr>
+        <p:txBody>
+          <a:bodyPr wrap="square" lIns="0" rIns="0" tIns="0" bIns="0" anchor="t">
+            <a:spAutoFit/>
+          </a:bodyPr>
+          <a:lstStyle/>
+          <a:p>
+            <a:r>
+              <a:rPr sz="1100" b="1">
+                <a:solidFill>
+                  <a:srgbClr val="7C5CE0"/>
+                </a:solidFill>
+                <a:latin typeface="Calibri"/>
+              </a:rPr>
+              <a:t>ADHD-appar 2025</a:t>
+            </a:r>
+          </a:p>
+        </p:txBody>
+      </p:sp>
+      <p:sp>
+        <p:nvSpPr>
+          <p:cNvPr id="25" name="TextBox 24"/>
+          <p:cNvSpPr txBox="1"/>
+          <p:nvPr/>
+        </p:nvSpPr>
+        <p:spPr>
+          <a:xfrm>
+            <a:off x="868680" y="4233280"/>
+            <a:ext cx="1965960" cy="380000"/>
+          </a:xfrm>
+          <a:prstGeom prst="rect">
+            <a:avLst/>
+          </a:prstGeom>
+          <a:noFill/>
+        </p:spPr>
+        <p:txBody>
+          <a:bodyPr wrap="square" lIns="0" rIns="0" tIns="0" bIns="0" anchor="t">
+            <a:spAutoFit/>
+          </a:bodyPr>
+          <a:lstStyle/>
+          <a:p>
+            <a:r>
+              <a:rPr sz="900" b="0">
+                <a:solidFill>
+                  <a:srgbClr val="6F6789"/>
+                </a:solidFill>
+                <a:latin typeface="Calibri"/>
+              </a:rPr>
+              <a:t>Uppskattad global marknad för ADHD-appar 2025.</a:t>
+            </a:r>
+          </a:p>
+        </p:txBody>
+      </p:sp>
+      <p:sp>
+        <p:nvSpPr>
+          <p:cNvPr id="26" name="Rounded Rectangle 25"/>
+          <p:cNvSpPr/>
+          <p:nvPr/>
+        </p:nvSpPr>
+        <p:spPr>
+          <a:xfrm>
+            <a:off x="3337560" y="3383280"/>
+            <a:ext cx="2423160" cy="1280160"/>
+          </a:xfrm>
+          <a:prstGeom prst="roundRect">
+            <a:avLst/>
+          </a:prstGeom>
+          <a:solidFill>
+            <a:srgbClr val="FFFFFF"/>
+          </a:solidFill>
+          <a:ln>
+            <a:noFill/>
+          </a:ln>
+          <a:effectLst/>
+        </p:spPr>
+        <p:style>
+          <a:lnRef idx="1">
+            <a:schemeClr val="accent1"/>
+          </a:lnRef>
+          <a:fillRef idx="3">
+            <a:schemeClr val="accent1"/>
+          </a:fillRef>
+          <a:effectRef idx="2">
+            <a:schemeClr val="accent1"/>
+          </a:effectRef>
+          <a:fontRef idx="minor">
+            <a:schemeClr val="lt1"/>
+          </a:fontRef>
+        </p:style>
+        <p:txBody>
+          <a:bodyPr rtlCol="0" anchor="ctr"/>
+          <a:lstStyle/>
+          <a:p>
+            <a:pPr algn="ctr"/>
+          </a:p>
+        </p:txBody>
+      </p:sp>
+      <p:sp>
+        <p:nvSpPr>
+          <p:cNvPr id="27" name="Rounded Rectangle 26"/>
+          <p:cNvSpPr/>
+          <p:nvPr/>
+        </p:nvSpPr>
+        <p:spPr>
+          <a:xfrm>
+            <a:off x="3566160" y="3566160"/>
+            <a:ext cx="411480" cy="91440"/>
+          </a:xfrm>
+          <a:prstGeom prst="roundRect">
+            <a:avLst/>
+          </a:prstGeom>
+          <a:solidFill>
+            <a:srgbClr val="A98CF0"/>
+          </a:solidFill>
+          <a:ln>
+            <a:noFill/>
+          </a:ln>
+          <a:effectLst/>
+        </p:spPr>
+        <p:style>
+          <a:lnRef idx="1">
+            <a:schemeClr val="accent1"/>
+          </a:lnRef>
+          <a:fillRef idx="3">
+            <a:schemeClr val="accent1"/>
+          </a:fillRef>
+          <a:effectRef idx="2">
+            <a:schemeClr val="accent1"/>
+          </a:effectRef>
+          <a:fontRef idx="minor">
+            <a:schemeClr val="lt1"/>
+          </a:fontRef>
+        </p:style>
+        <p:txBody>
+          <a:bodyPr rtlCol="0" anchor="ctr"/>
+          <a:lstStyle/>
+          <a:p>
+            <a:pPr algn="ctr"/>
+          </a:p>
+        </p:txBody>
+      </p:sp>
+      <p:sp>
+        <p:nvSpPr>
+          <p:cNvPr id="28" name="TextBox 27"/>
+          <p:cNvSpPr txBox="1"/>
+          <p:nvPr/>
+        </p:nvSpPr>
+        <p:spPr>
+          <a:xfrm>
+            <a:off x="3566160" y="3718560"/>
+            <a:ext cx="1965960" cy="320040"/>
+          </a:xfrm>
+          <a:prstGeom prst="rect">
+            <a:avLst/>
+          </a:prstGeom>
+          <a:noFill/>
+        </p:spPr>
+        <p:txBody>
+          <a:bodyPr wrap="square" lIns="0" rIns="0" tIns="0" bIns="0" anchor="t">
+            <a:spAutoFit/>
+          </a:bodyPr>
+          <a:lstStyle/>
+          <a:p>
+            <a:r>
+              <a:rPr sz="2400" b="1">
+                <a:solidFill>
+                  <a:srgbClr val="241C3B"/>
+                </a:solidFill>
+                <a:latin typeface="Trebuchet MS"/>
+              </a:rPr>
+              <a:t>$6,7B</a:t>
+            </a:r>
+          </a:p>
+        </p:txBody>
+      </p:sp>
+      <p:sp>
+        <p:nvSpPr>
+          <p:cNvPr id="29" name="TextBox 28"/>
+          <p:cNvSpPr txBox="1"/>
+          <p:nvPr/>
+        </p:nvSpPr>
+        <p:spPr>
+          <a:xfrm>
+            <a:off x="3566160" y="4038600"/>
+            <a:ext cx="1965960" cy="220000"/>
+          </a:xfrm>
+          <a:prstGeom prst="rect">
+            <a:avLst/>
+          </a:prstGeom>
+          <a:noFill/>
+        </p:spPr>
+        <p:txBody>
+          <a:bodyPr wrap="square" lIns="0" rIns="0" tIns="0" bIns="0" anchor="t">
+            <a:spAutoFit/>
+          </a:bodyPr>
+          <a:lstStyle/>
+          <a:p>
+            <a:r>
+              <a:rPr sz="1100" b="1">
+                <a:solidFill>
+                  <a:srgbClr val="A98CF0"/>
+                </a:solidFill>
+                <a:latin typeface="Calibri"/>
+              </a:rPr>
+              <a:t>ADHD-appar 2033</a:t>
+            </a:r>
+          </a:p>
+        </p:txBody>
+      </p:sp>
+      <p:sp>
+        <p:nvSpPr>
+          <p:cNvPr id="30" name="TextBox 29"/>
+          <p:cNvSpPr txBox="1"/>
+          <p:nvPr/>
+        </p:nvSpPr>
+        <p:spPr>
+          <a:xfrm>
+            <a:off x="3566160" y="4233280"/>
+            <a:ext cx="1965960" cy="380000"/>
+          </a:xfrm>
+          <a:prstGeom prst="rect">
+            <a:avLst/>
+          </a:prstGeom>
+          <a:noFill/>
+        </p:spPr>
+        <p:txBody>
+          <a:bodyPr wrap="square" lIns="0" rIns="0" tIns="0" bIns="0" anchor="t">
+            <a:spAutoFit/>
+          </a:bodyPr>
+          <a:lstStyle/>
+          <a:p>
+            <a:r>
+              <a:rPr sz="900" b="0">
+                <a:solidFill>
+                  <a:srgbClr val="6F6789"/>
+                </a:solidFill>
+                <a:latin typeface="Calibri"/>
+              </a:rPr>
+              <a:t>Prognostiserad global marknad för ADHD-appar 2033.</a:t>
+            </a:r>
+          </a:p>
+        </p:txBody>
+      </p:sp>
+      <p:sp>
+        <p:nvSpPr>
+          <p:cNvPr id="31" name="Rounded Rectangle 30"/>
+          <p:cNvSpPr/>
+          <p:nvPr/>
+        </p:nvSpPr>
+        <p:spPr>
+          <a:xfrm>
+            <a:off x="6035040" y="3383280"/>
+            <a:ext cx="2423160" cy="1280160"/>
+          </a:xfrm>
+          <a:prstGeom prst="roundRect">
+            <a:avLst/>
+          </a:prstGeom>
+          <a:solidFill>
+            <a:srgbClr val="FFFFFF"/>
+          </a:solidFill>
+          <a:ln>
+            <a:noFill/>
+          </a:ln>
+          <a:effectLst/>
+        </p:spPr>
+        <p:style>
+          <a:lnRef idx="1">
+            <a:schemeClr val="accent1"/>
+          </a:lnRef>
+          <a:fillRef idx="3">
+            <a:schemeClr val="accent1"/>
+          </a:fillRef>
+          <a:effectRef idx="2">
+            <a:schemeClr val="accent1"/>
+          </a:effectRef>
+          <a:fontRef idx="minor">
+            <a:schemeClr val="lt1"/>
+          </a:fontRef>
+        </p:style>
+        <p:txBody>
+          <a:bodyPr rtlCol="0" anchor="ctr"/>
+          <a:lstStyle/>
+          <a:p>
+            <a:pPr algn="ctr"/>
+          </a:p>
+        </p:txBody>
+      </p:sp>
+      <p:sp>
+        <p:nvSpPr>
+          <p:cNvPr id="32" name="Rounded Rectangle 31"/>
+          <p:cNvSpPr/>
+          <p:nvPr/>
+        </p:nvSpPr>
+        <p:spPr>
+          <a:xfrm>
+            <a:off x="6263640" y="3566160"/>
+            <a:ext cx="411480" cy="91440"/>
+          </a:xfrm>
+          <a:prstGeom prst="roundRect">
+            <a:avLst/>
+          </a:prstGeom>
+          <a:solidFill>
+            <a:srgbClr val="F2A8CE"/>
+          </a:solidFill>
+          <a:ln>
+            <a:noFill/>
+          </a:ln>
+          <a:effectLst/>
+        </p:spPr>
+        <p:style>
+          <a:lnRef idx="1">
+            <a:schemeClr val="accent1"/>
+          </a:lnRef>
+          <a:fillRef idx="3">
+            <a:schemeClr val="accent1"/>
+          </a:fillRef>
+          <a:effectRef idx="2">
+            <a:schemeClr val="accent1"/>
+          </a:effectRef>
+          <a:fontRef idx="minor">
+            <a:schemeClr val="lt1"/>
+          </a:fontRef>
+        </p:style>
+        <p:txBody>
+          <a:bodyPr rtlCol="0" anchor="ctr"/>
+          <a:lstStyle/>
+          <a:p>
+            <a:pPr algn="ctr"/>
+          </a:p>
+        </p:txBody>
+      </p:sp>
+      <p:sp>
+        <p:nvSpPr>
+          <p:cNvPr id="33" name="TextBox 32"/>
+          <p:cNvSpPr txBox="1"/>
+          <p:nvPr/>
+        </p:nvSpPr>
+        <p:spPr>
+          <a:xfrm>
+            <a:off x="6263640" y="3718560"/>
+            <a:ext cx="1965960" cy="320040"/>
+          </a:xfrm>
+          <a:prstGeom prst="rect">
+            <a:avLst/>
+          </a:prstGeom>
+          <a:noFill/>
+        </p:spPr>
+        <p:txBody>
+          <a:bodyPr wrap="square" lIns="0" rIns="0" tIns="0" bIns="0" anchor="t">
+            <a:spAutoFit/>
+          </a:bodyPr>
+          <a:lstStyle/>
+          <a:p>
+            <a:r>
+              <a:rPr sz="2400" b="1">
+                <a:solidFill>
+                  <a:srgbClr val="241C3B"/>
+                </a:solidFill>
+                <a:latin typeface="Trebuchet MS"/>
+              </a:rPr>
+              <a:t>17,5 %</a:t>
+            </a:r>
+          </a:p>
+        </p:txBody>
+      </p:sp>
+      <p:sp>
+        <p:nvSpPr>
+          <p:cNvPr id="34" name="TextBox 33"/>
+          <p:cNvSpPr txBox="1"/>
+          <p:nvPr/>
+        </p:nvSpPr>
+        <p:spPr>
+          <a:xfrm>
+            <a:off x="6263640" y="4038600"/>
+            <a:ext cx="1965960" cy="220000"/>
+          </a:xfrm>
+          <a:prstGeom prst="rect">
+            <a:avLst/>
+          </a:prstGeom>
+          <a:noFill/>
+        </p:spPr>
+        <p:txBody>
+          <a:bodyPr wrap="square" lIns="0" rIns="0" tIns="0" bIns="0" anchor="t">
+            <a:spAutoFit/>
+          </a:bodyPr>
+          <a:lstStyle/>
+          <a:p>
+            <a:r>
+              <a:rPr sz="1100" b="1">
+                <a:solidFill>
+                  <a:srgbClr val="6F6789"/>
+                </a:solidFill>
+                <a:latin typeface="Calibri"/>
+              </a:rPr>
+              <a:t>CAGR 2025–2033</a:t>
+            </a:r>
+          </a:p>
+        </p:txBody>
+      </p:sp>
+      <p:sp>
+        <p:nvSpPr>
+          <p:cNvPr id="35" name="TextBox 34"/>
+          <p:cNvSpPr txBox="1"/>
+          <p:nvPr/>
+        </p:nvSpPr>
+        <p:spPr>
+          <a:xfrm>
+            <a:off x="6263640" y="4233280"/>
+            <a:ext cx="1965960" cy="380000"/>
+          </a:xfrm>
+          <a:prstGeom prst="rect">
+            <a:avLst/>
+          </a:prstGeom>
+          <a:noFill/>
+        </p:spPr>
+        <p:txBody>
+          <a:bodyPr wrap="square" lIns="0" rIns="0" tIns="0" bIns="0" anchor="t">
+            <a:spAutoFit/>
+          </a:bodyPr>
+          <a:lstStyle/>
+          <a:p>
+            <a:r>
+              <a:rPr sz="900" b="0">
+                <a:solidFill>
+                  <a:srgbClr val="6F6789"/>
+                </a:solidFill>
+                <a:latin typeface="Calibri"/>
+              </a:rPr>
+              <a:t>Prognostiserad årlig tillväxt för ADHD-appmarknaden.</a:t>
+            </a:r>
+          </a:p>
+        </p:txBody>
+      </p:sp>
+      <p:sp>
+        <p:nvSpPr>
+          <p:cNvPr id="36" name="TextBox 35"/>
+          <p:cNvSpPr txBox="1"/>
+          <p:nvPr/>
+        </p:nvSpPr>
+        <p:spPr>
+          <a:xfrm>
+            <a:off x="640080" y="4343400"/>
+            <a:ext cx="7863840" cy="260000"/>
+          </a:xfrm>
+          <a:prstGeom prst="rect">
+            <a:avLst/>
+          </a:prstGeom>
+          <a:noFill/>
+        </p:spPr>
+        <p:txBody>
+          <a:bodyPr wrap="square" lIns="0" rIns="0" tIns="0" bIns="0" anchor="t">
+            <a:spAutoFit/>
+          </a:bodyPr>
+          <a:lstStyle/>
+          <a:p>
+            <a:r>
+              <a:rPr sz="950" b="1">
+                <a:solidFill>
+                  <a:srgbClr val="6F6789"/>
+                </a:solidFill>
+                <a:latin typeface="Calibri"/>
+              </a:rPr>
+              <a:t>Uppskattningar och prognoser – externa marknadssiffror, inte MyFloves egna traction-siffror.</a:t>
+            </a:r>
+          </a:p>
+        </p:txBody>
+      </p:sp>
+      <p:sp>
+        <p:nvSpPr>
+          <p:cNvPr id="37" name="TextBox 36"/>
+          <p:cNvSpPr txBox="1"/>
+          <p:nvPr/>
+        </p:nvSpPr>
+        <p:spPr>
+          <a:xfrm>
+            <a:off x="640080" y="4526280"/>
+            <a:ext cx="7863840" cy="300000"/>
+          </a:xfrm>
+          <a:prstGeom prst="rect">
+            <a:avLst/>
+          </a:prstGeom>
+          <a:noFill/>
+        </p:spPr>
+        <p:txBody>
+          <a:bodyPr wrap="square" lIns="0" rIns="0" tIns="0" bIns="0" anchor="t">
+            <a:spAutoFit/>
+          </a:bodyPr>
+          <a:lstStyle/>
+          <a:p>
+            <a:r>
+              <a:rPr sz="850" b="0">
+                <a:solidFill>
+                  <a:srgbClr val="6F6789"/>
+                </a:solidFill>
+                <a:latin typeface="Calibri"/>
+              </a:rPr>
+              <a:t>Källor: Global systematisk översikt (PubMed, 2021) · Socialstyrelsen · Grand View Research, ADHD Apps Market · aktuell marknadsrapport för digital hälsa för neurodivergenta användare.</a:t>
+            </a:r>
+          </a:p>
+        </p:txBody>
+      </p:sp>
+      <p:sp>
+        <p:nvSpPr>
+          <p:cNvPr id="38" name="TextBox 37"/>
+          <p:cNvSpPr txBox="1"/>
+          <p:nvPr/>
+        </p:nvSpPr>
+        <p:spPr>
+          <a:xfrm>
+            <a:off x="640080" y="4785360"/>
+            <a:ext cx="7863840" cy="260000"/>
+          </a:xfrm>
+          <a:prstGeom prst="rect">
+            <a:avLst/>
+          </a:prstGeom>
+          <a:noFill/>
+        </p:spPr>
+        <p:txBody>
+          <a:bodyPr wrap="square" lIns="0" rIns="0" tIns="0" bIns="0" anchor="t">
+            <a:spAutoFit/>
+          </a:bodyPr>
+          <a:lstStyle/>
+          <a:p>
+            <a:r>
+              <a:rPr sz="1100" b="1">
+                <a:solidFill>
+                  <a:srgbClr val="7C5CE0"/>
+                </a:solidFill>
+                <a:latin typeface="Trebuchet MS"/>
+              </a:rPr>
+              <a:t>MyFlove starts with ADHD — but is built for the complexity of everyday life.</a:t>
             </a:r>
           </a:p>
         </p:txBody>
@@ -3861,6 +4865,635 @@
 </file>
 
 <file path=ppt/slides/slide5.xml><?xml version="1.0" encoding="utf-8"?>
+<p:sld xmlns:a="http://schemas.openxmlformats.org/drawingml/2006/main" xmlns:p="http://schemas.openxmlformats.org/presentationml/2006/main" xmlns:r="http://schemas.openxmlformats.org/officeDocument/2006/relationships">
+  <p:cSld>
+    <p:bg>
+      <p:bgPr>
+        <a:solidFill>
+          <a:srgbClr val="F7F3FE"/>
+        </a:solidFill>
+        <a:effectLst/>
+      </p:bgPr>
+    </p:bg>
+    <p:spTree>
+      <p:nvGrpSpPr>
+        <p:cNvPr id="1" name=""/>
+        <p:cNvGrpSpPr/>
+        <p:nvPr/>
+      </p:nvGrpSpPr>
+      <p:grpSpPr/>
+      <p:sp>
+        <p:nvSpPr>
+          <p:cNvPr id="2" name="TextBox 1"/>
+          <p:cNvSpPr txBox="1"/>
+          <p:nvPr/>
+        </p:nvSpPr>
+        <p:spPr>
+          <a:xfrm>
+            <a:off x="640080" y="457200"/>
+            <a:ext cx="7863840" cy="320040"/>
+          </a:xfrm>
+          <a:prstGeom prst="rect">
+            <a:avLst/>
+          </a:prstGeom>
+          <a:noFill/>
+        </p:spPr>
+        <p:txBody>
+          <a:bodyPr wrap="square">
+            <a:spAutoFit/>
+          </a:bodyPr>
+          <a:lstStyle/>
+          <a:p>
+            <a:pPr algn="l"/>
+            <a:r>
+              <a:rPr sz="1300" b="1">
+                <a:solidFill>
+                  <a:srgbClr val="7C5CE0"/>
+                </a:solidFill>
+                <a:latin typeface="Calibri"/>
+              </a:rPr>
+              <a:t>FLOW 2.0</a:t>
+            </a:r>
+          </a:p>
+        </p:txBody>
+      </p:sp>
+      <p:sp>
+        <p:nvSpPr>
+          <p:cNvPr id="3" name="TextBox 2"/>
+          <p:cNvSpPr txBox="1"/>
+          <p:nvPr/>
+        </p:nvSpPr>
+        <p:spPr>
+          <a:xfrm>
+            <a:off x="640080" y="822960"/>
+            <a:ext cx="5200000" cy="1097280"/>
+          </a:xfrm>
+          <a:prstGeom prst="rect">
+            <a:avLst/>
+          </a:prstGeom>
+          <a:noFill/>
+        </p:spPr>
+        <p:txBody>
+          <a:bodyPr wrap="square">
+            <a:spAutoFit/>
+          </a:bodyPr>
+          <a:lstStyle/>
+          <a:p>
+            <a:pPr algn="l"/>
+            <a:r>
+              <a:rPr sz="3200" b="1">
+                <a:solidFill>
+                  <a:srgbClr val="241C3B"/>
+                </a:solidFill>
+                <a:latin typeface="Trebuchet MS"/>
+              </a:rPr>
+              <a:t>Följeslagaren som gör appen mänsklig</a:t>
+            </a:r>
+          </a:p>
+        </p:txBody>
+      </p:sp>
+      <p:sp>
+        <p:nvSpPr>
+          <p:cNvPr id="4" name="TextBox 3"/>
+          <p:cNvSpPr txBox="1"/>
+          <p:nvPr/>
+        </p:nvSpPr>
+        <p:spPr>
+          <a:xfrm>
+            <a:off x="640080" y="1850000"/>
+            <a:ext cx="4900000" cy="700000"/>
+          </a:xfrm>
+          <a:prstGeom prst="rect">
+            <a:avLst/>
+          </a:prstGeom>
+          <a:noFill/>
+        </p:spPr>
+        <p:txBody>
+          <a:bodyPr wrap="square">
+            <a:spAutoFit/>
+          </a:bodyPr>
+          <a:lstStyle/>
+          <a:p>
+            <a:pPr algn="l"/>
+            <a:r>
+              <a:rPr sz="1300" b="0">
+                <a:solidFill>
+                  <a:srgbClr val="6F6789"/>
+                </a:solidFill>
+                <a:latin typeface="Calibri"/>
+              </a:rPr>
+              <a:t>Flow är MyFloves röst och ansikte – en levande figur som reagerar på energi, väder, medicin och dagens plan. En sak i taget, aldrig skäll.</a:t>
+            </a:r>
+          </a:p>
+        </p:txBody>
+      </p:sp>
+      <p:pic>
+        <p:nvPicPr>
+          <p:cNvPr id="5" name="Picture 4" descr="flow-mascot.png"/>
+          <p:cNvPicPr>
+            <a:picLocks noChangeAspect="1"/>
+          </p:cNvPicPr>
+          <p:nvPr/>
+        </p:nvPicPr>
+        <p:blipFill>
+          <a:blip r:embed="rId2"/>
+          <a:stretch>
+            <a:fillRect/>
+          </a:stretch>
+        </p:blipFill>
+        <p:spPr>
+          <a:xfrm>
+            <a:off x="5750000" y="1150000"/>
+            <a:ext cx="3626645" cy="2450000"/>
+          </a:xfrm>
+          <a:prstGeom prst="rect">
+            <a:avLst/>
+          </a:prstGeom>
+        </p:spPr>
+      </p:pic>
+      <p:sp>
+        <p:nvSpPr>
+          <p:cNvPr id="6" name="Rounded Rectangle 5"/>
+          <p:cNvSpPr/>
+          <p:nvPr/>
+        </p:nvSpPr>
+        <p:spPr>
+          <a:xfrm>
+            <a:off x="640080" y="2900000"/>
+            <a:ext cx="2423160" cy="1750000"/>
+          </a:xfrm>
+          <a:prstGeom prst="roundRect">
+            <a:avLst/>
+          </a:prstGeom>
+          <a:solidFill>
+            <a:srgbClr val="FFFFFF"/>
+          </a:solidFill>
+          <a:ln>
+            <a:noFill/>
+          </a:ln>
+          <a:effectLst/>
+        </p:spPr>
+        <p:style>
+          <a:lnRef idx="1">
+            <a:schemeClr val="accent1"/>
+          </a:lnRef>
+          <a:fillRef idx="3">
+            <a:schemeClr val="accent1"/>
+          </a:fillRef>
+          <a:effectRef idx="2">
+            <a:schemeClr val="accent1"/>
+          </a:effectRef>
+          <a:fontRef idx="minor">
+            <a:schemeClr val="lt1"/>
+          </a:fontRef>
+        </p:style>
+        <p:txBody>
+          <a:bodyPr rtlCol="0" anchor="ctr"/>
+          <a:lstStyle/>
+          <a:p>
+            <a:pPr algn="ctr"/>
+          </a:p>
+        </p:txBody>
+      </p:sp>
+      <p:sp>
+        <p:nvSpPr>
+          <p:cNvPr id="7" name="Rounded Rectangle 6"/>
+          <p:cNvSpPr/>
+          <p:nvPr/>
+        </p:nvSpPr>
+        <p:spPr>
+          <a:xfrm>
+            <a:off x="868680" y="3128600"/>
+            <a:ext cx="411480" cy="109728"/>
+          </a:xfrm>
+          <a:prstGeom prst="roundRect">
+            <a:avLst/>
+          </a:prstGeom>
+          <a:solidFill>
+            <a:srgbClr val="7C5CE0"/>
+          </a:solidFill>
+          <a:ln>
+            <a:noFill/>
+          </a:ln>
+          <a:effectLst/>
+        </p:spPr>
+        <p:style>
+          <a:lnRef idx="1">
+            <a:schemeClr val="accent1"/>
+          </a:lnRef>
+          <a:fillRef idx="3">
+            <a:schemeClr val="accent1"/>
+          </a:fillRef>
+          <a:effectRef idx="2">
+            <a:schemeClr val="accent1"/>
+          </a:effectRef>
+          <a:fontRef idx="minor">
+            <a:schemeClr val="lt1"/>
+          </a:fontRef>
+        </p:style>
+        <p:txBody>
+          <a:bodyPr rtlCol="0" anchor="ctr"/>
+          <a:lstStyle/>
+          <a:p>
+            <a:pPr algn="ctr"/>
+          </a:p>
+        </p:txBody>
+      </p:sp>
+      <p:sp>
+        <p:nvSpPr>
+          <p:cNvPr id="8" name="TextBox 7"/>
+          <p:cNvSpPr txBox="1"/>
+          <p:nvPr/>
+        </p:nvSpPr>
+        <p:spPr>
+          <a:xfrm>
+            <a:off x="868680" y="3380000"/>
+            <a:ext cx="1965960" cy="400000"/>
+          </a:xfrm>
+          <a:prstGeom prst="rect">
+            <a:avLst/>
+          </a:prstGeom>
+          <a:noFill/>
+        </p:spPr>
+        <p:txBody>
+          <a:bodyPr wrap="square">
+            <a:spAutoFit/>
+          </a:bodyPr>
+          <a:lstStyle/>
+          <a:p>
+            <a:pPr algn="l"/>
+            <a:r>
+              <a:rPr sz="1600" b="1">
+                <a:solidFill>
+                  <a:srgbClr val="241C3B"/>
+                </a:solidFill>
+                <a:latin typeface="Trebuchet MS"/>
+              </a:rPr>
+              <a:t>12 lägen</a:t>
+            </a:r>
+          </a:p>
+        </p:txBody>
+      </p:sp>
+      <p:sp>
+        <p:nvSpPr>
+          <p:cNvPr id="9" name="TextBox 8"/>
+          <p:cNvSpPr txBox="1"/>
+          <p:nvPr/>
+        </p:nvSpPr>
+        <p:spPr>
+          <a:xfrm>
+            <a:off x="868680" y="3750000"/>
+            <a:ext cx="1965960" cy="750000"/>
+          </a:xfrm>
+          <a:prstGeom prst="rect">
+            <a:avLst/>
+          </a:prstGeom>
+          <a:noFill/>
+        </p:spPr>
+        <p:txBody>
+          <a:bodyPr wrap="square">
+            <a:spAutoFit/>
+          </a:bodyPr>
+          <a:lstStyle/>
+          <a:p>
+            <a:pPr algn="l"/>
+            <a:r>
+              <a:rPr sz="1200" b="0">
+                <a:solidFill>
+                  <a:srgbClr val="6F6789"/>
+                </a:solidFill>
+                <a:latin typeface="Calibri"/>
+              </a:rPr>
+              <a:t>Regn, sömn, paus, studier, jobb, städ, mat, resa, låg/hög energi, klart, återhämtning.</a:t>
+            </a:r>
+          </a:p>
+        </p:txBody>
+      </p:sp>
+      <p:sp>
+        <p:nvSpPr>
+          <p:cNvPr id="10" name="Rounded Rectangle 9"/>
+          <p:cNvSpPr/>
+          <p:nvPr/>
+        </p:nvSpPr>
+        <p:spPr>
+          <a:xfrm>
+            <a:off x="3337560" y="2900000"/>
+            <a:ext cx="2423160" cy="1750000"/>
+          </a:xfrm>
+          <a:prstGeom prst="roundRect">
+            <a:avLst/>
+          </a:prstGeom>
+          <a:solidFill>
+            <a:srgbClr val="FFFFFF"/>
+          </a:solidFill>
+          <a:ln>
+            <a:noFill/>
+          </a:ln>
+          <a:effectLst/>
+        </p:spPr>
+        <p:style>
+          <a:lnRef idx="1">
+            <a:schemeClr val="accent1"/>
+          </a:lnRef>
+          <a:fillRef idx="3">
+            <a:schemeClr val="accent1"/>
+          </a:fillRef>
+          <a:effectRef idx="2">
+            <a:schemeClr val="accent1"/>
+          </a:effectRef>
+          <a:fontRef idx="minor">
+            <a:schemeClr val="lt1"/>
+          </a:fontRef>
+        </p:style>
+        <p:txBody>
+          <a:bodyPr rtlCol="0" anchor="ctr"/>
+          <a:lstStyle/>
+          <a:p>
+            <a:pPr algn="ctr"/>
+          </a:p>
+        </p:txBody>
+      </p:sp>
+      <p:sp>
+        <p:nvSpPr>
+          <p:cNvPr id="11" name="Rounded Rectangle 10"/>
+          <p:cNvSpPr/>
+          <p:nvPr/>
+        </p:nvSpPr>
+        <p:spPr>
+          <a:xfrm>
+            <a:off x="3566160" y="3128600"/>
+            <a:ext cx="411480" cy="109728"/>
+          </a:xfrm>
+          <a:prstGeom prst="roundRect">
+            <a:avLst/>
+          </a:prstGeom>
+          <a:solidFill>
+            <a:srgbClr val="A98CF0"/>
+          </a:solidFill>
+          <a:ln>
+            <a:noFill/>
+          </a:ln>
+          <a:effectLst/>
+        </p:spPr>
+        <p:style>
+          <a:lnRef idx="1">
+            <a:schemeClr val="accent1"/>
+          </a:lnRef>
+          <a:fillRef idx="3">
+            <a:schemeClr val="accent1"/>
+          </a:fillRef>
+          <a:effectRef idx="2">
+            <a:schemeClr val="accent1"/>
+          </a:effectRef>
+          <a:fontRef idx="minor">
+            <a:schemeClr val="lt1"/>
+          </a:fontRef>
+        </p:style>
+        <p:txBody>
+          <a:bodyPr rtlCol="0" anchor="ctr"/>
+          <a:lstStyle/>
+          <a:p>
+            <a:pPr algn="ctr"/>
+          </a:p>
+        </p:txBody>
+      </p:sp>
+      <p:sp>
+        <p:nvSpPr>
+          <p:cNvPr id="12" name="TextBox 11"/>
+          <p:cNvSpPr txBox="1"/>
+          <p:nvPr/>
+        </p:nvSpPr>
+        <p:spPr>
+          <a:xfrm>
+            <a:off x="3566160" y="3380000"/>
+            <a:ext cx="1965960" cy="400000"/>
+          </a:xfrm>
+          <a:prstGeom prst="rect">
+            <a:avLst/>
+          </a:prstGeom>
+          <a:noFill/>
+        </p:spPr>
+        <p:txBody>
+          <a:bodyPr wrap="square">
+            <a:spAutoFit/>
+          </a:bodyPr>
+          <a:lstStyle/>
+          <a:p>
+            <a:pPr algn="l"/>
+            <a:r>
+              <a:rPr sz="1600" b="1">
+                <a:solidFill>
+                  <a:srgbClr val="241C3B"/>
+                </a:solidFill>
+                <a:latin typeface="Trebuchet MS"/>
+              </a:rPr>
+              <a:t>I hela appen</a:t>
+            </a:r>
+          </a:p>
+        </p:txBody>
+      </p:sp>
+      <p:sp>
+        <p:nvSpPr>
+          <p:cNvPr id="13" name="TextBox 12"/>
+          <p:cNvSpPr txBox="1"/>
+          <p:nvPr/>
+        </p:nvSpPr>
+        <p:spPr>
+          <a:xfrm>
+            <a:off x="3566160" y="3750000"/>
+            <a:ext cx="1965960" cy="750000"/>
+          </a:xfrm>
+          <a:prstGeom prst="rect">
+            <a:avLst/>
+          </a:prstGeom>
+          <a:noFill/>
+        </p:spPr>
+        <p:txBody>
+          <a:bodyPr wrap="square">
+            <a:spAutoFit/>
+          </a:bodyPr>
+          <a:lstStyle/>
+          <a:p>
+            <a:pPr algn="l"/>
+            <a:r>
+              <a:rPr sz="1200" b="0">
+                <a:solidFill>
+                  <a:srgbClr val="6F6789"/>
+                </a:solidFill>
+                <a:latin typeface="Calibri"/>
+              </a:rPr>
+              <a:t>Stor på Hem och Min dag, liten följeslagare i övriga vyer – och i Flow-previewen.</a:t>
+            </a:r>
+          </a:p>
+        </p:txBody>
+      </p:sp>
+      <p:sp>
+        <p:nvSpPr>
+          <p:cNvPr id="14" name="Rounded Rectangle 13"/>
+          <p:cNvSpPr/>
+          <p:nvPr/>
+        </p:nvSpPr>
+        <p:spPr>
+          <a:xfrm>
+            <a:off x="6035040" y="2900000"/>
+            <a:ext cx="2423160" cy="1750000"/>
+          </a:xfrm>
+          <a:prstGeom prst="roundRect">
+            <a:avLst/>
+          </a:prstGeom>
+          <a:solidFill>
+            <a:srgbClr val="FFFFFF"/>
+          </a:solidFill>
+          <a:ln>
+            <a:noFill/>
+          </a:ln>
+          <a:effectLst/>
+        </p:spPr>
+        <p:style>
+          <a:lnRef idx="1">
+            <a:schemeClr val="accent1"/>
+          </a:lnRef>
+          <a:fillRef idx="3">
+            <a:schemeClr val="accent1"/>
+          </a:fillRef>
+          <a:effectRef idx="2">
+            <a:schemeClr val="accent1"/>
+          </a:effectRef>
+          <a:fontRef idx="minor">
+            <a:schemeClr val="lt1"/>
+          </a:fontRef>
+        </p:style>
+        <p:txBody>
+          <a:bodyPr rtlCol="0" anchor="ctr"/>
+          <a:lstStyle/>
+          <a:p>
+            <a:pPr algn="ctr"/>
+          </a:p>
+        </p:txBody>
+      </p:sp>
+      <p:sp>
+        <p:nvSpPr>
+          <p:cNvPr id="15" name="Rounded Rectangle 14"/>
+          <p:cNvSpPr/>
+          <p:nvPr/>
+        </p:nvSpPr>
+        <p:spPr>
+          <a:xfrm>
+            <a:off x="6263640" y="3128600"/>
+            <a:ext cx="411480" cy="109728"/>
+          </a:xfrm>
+          <a:prstGeom prst="roundRect">
+            <a:avLst/>
+          </a:prstGeom>
+          <a:solidFill>
+            <a:srgbClr val="F2A8CE"/>
+          </a:solidFill>
+          <a:ln>
+            <a:noFill/>
+          </a:ln>
+          <a:effectLst/>
+        </p:spPr>
+        <p:style>
+          <a:lnRef idx="1">
+            <a:schemeClr val="accent1"/>
+          </a:lnRef>
+          <a:fillRef idx="3">
+            <a:schemeClr val="accent1"/>
+          </a:fillRef>
+          <a:effectRef idx="2">
+            <a:schemeClr val="accent1"/>
+          </a:effectRef>
+          <a:fontRef idx="minor">
+            <a:schemeClr val="lt1"/>
+          </a:fontRef>
+        </p:style>
+        <p:txBody>
+          <a:bodyPr rtlCol="0" anchor="ctr"/>
+          <a:lstStyle/>
+          <a:p>
+            <a:pPr algn="ctr"/>
+          </a:p>
+        </p:txBody>
+      </p:sp>
+      <p:sp>
+        <p:nvSpPr>
+          <p:cNvPr id="16" name="TextBox 15"/>
+          <p:cNvSpPr txBox="1"/>
+          <p:nvPr/>
+        </p:nvSpPr>
+        <p:spPr>
+          <a:xfrm>
+            <a:off x="6263640" y="3380000"/>
+            <a:ext cx="1965960" cy="400000"/>
+          </a:xfrm>
+          <a:prstGeom prst="rect">
+            <a:avLst/>
+          </a:prstGeom>
+          <a:noFill/>
+        </p:spPr>
+        <p:txBody>
+          <a:bodyPr wrap="square">
+            <a:spAutoFit/>
+          </a:bodyPr>
+          <a:lstStyle/>
+          <a:p>
+            <a:pPr algn="l"/>
+            <a:r>
+              <a:rPr sz="1600" b="1">
+                <a:solidFill>
+                  <a:srgbClr val="241C3B"/>
+                </a:solidFill>
+                <a:latin typeface="Trebuchet MS"/>
+              </a:rPr>
+              <a:t>Kännbar</a:t>
+            </a:r>
+          </a:p>
+        </p:txBody>
+      </p:sp>
+      <p:sp>
+        <p:nvSpPr>
+          <p:cNvPr id="17" name="TextBox 16"/>
+          <p:cNvSpPr txBox="1"/>
+          <p:nvPr/>
+        </p:nvSpPr>
+        <p:spPr>
+          <a:xfrm>
+            <a:off x="6263640" y="3750000"/>
+            <a:ext cx="1965960" cy="750000"/>
+          </a:xfrm>
+          <a:prstGeom prst="rect">
+            <a:avLst/>
+          </a:prstGeom>
+          <a:noFill/>
+        </p:spPr>
+        <p:txBody>
+          <a:bodyPr wrap="square">
+            <a:spAutoFit/>
+          </a:bodyPr>
+          <a:lstStyle/>
+          <a:p>
+            <a:pPr algn="l"/>
+            <a:r>
+              <a:rPr sz="1200" b="0">
+                <a:solidFill>
+                  <a:srgbClr val="6F6789"/>
+                </a:solidFill>
+                <a:latin typeface="Calibri"/>
+              </a:rPr>
+              <a:t>Haptisk återkoppling vid byte och avklarat – tyst läge och reducerad rörelse respekteras.</a:t>
+            </a:r>
+          </a:p>
+        </p:txBody>
+      </p:sp>
+    </p:spTree>
+  </p:cSld>
+  <p:clrMapOvr>
+    <a:masterClrMapping/>
+  </p:clrMapOvr>
+</p:sld>
+</file>
+
+<file path=ppt/slides/slide6.xml><?xml version="1.0" encoding="utf-8"?>
 <p:sld xmlns:a="http://schemas.openxmlformats.org/drawingml/2006/main" xmlns:r="http://schemas.openxmlformats.org/officeDocument/2006/relationships" xmlns:p="http://schemas.openxmlformats.org/presentationml/2006/main">
   <p:cSld name="Slide 5">
     <p:bg>
@@ -4595,7 +6228,7 @@
 </p:sld>
 </file>
 
-<file path=ppt/slides/slide6.xml><?xml version="1.0" encoding="utf-8"?>
+<file path=ppt/slides/slide7.xml><?xml version="1.0" encoding="utf-8"?>
 <p:sld xmlns:a="http://schemas.openxmlformats.org/drawingml/2006/main" xmlns:r="http://schemas.openxmlformats.org/officeDocument/2006/relationships" xmlns:p="http://schemas.openxmlformats.org/presentationml/2006/main">
   <p:cSld name="Slide 6">
     <p:bg>
@@ -5023,7 +6656,7 @@
 </p:sld>
 </file>
 
-<file path=ppt/slides/slide7.xml><?xml version="1.0" encoding="utf-8"?>
+<file path=ppt/slides/slide8.xml><?xml version="1.0" encoding="utf-8"?>
 <p:sld xmlns:a="http://schemas.openxmlformats.org/drawingml/2006/main" xmlns:r="http://schemas.openxmlformats.org/officeDocument/2006/relationships" xmlns:p="http://schemas.openxmlformats.org/presentationml/2006/main">
   <p:cSld name="Slide 7">
     <p:bg>
@@ -5655,7 +7288,7 @@
 </p:sld>
 </file>
 
-<file path=ppt/slides/slide8.xml><?xml version="1.0" encoding="utf-8"?>
+<file path=ppt/slides/slide9.xml><?xml version="1.0" encoding="utf-8"?>
 <p:sld xmlns:a="http://schemas.openxmlformats.org/drawingml/2006/main" xmlns:r="http://schemas.openxmlformats.org/officeDocument/2006/relationships" xmlns:p="http://schemas.openxmlformats.org/presentationml/2006/main">
   <p:cSld name="Slide 8">
     <p:bg>
@@ -6237,216 +7870,6 @@
               <a:t>Delad kalender och barnscheman. [PRIS – fyll i]</a:t>
             </a:r>
             <a:endParaRPr lang="en-US" sz="1400" dirty="0"/>
-          </a:p>
-        </p:txBody>
-      </p:sp>
-    </p:spTree>
-  </p:cSld>
-  <p:clrMapOvr>
-    <a:masterClrMapping/>
-  </p:clrMapOvr>
-</p:sld>
-</file>
-
-<file path=ppt/slides/slide9.xml><?xml version="1.0" encoding="utf-8"?>
-<p:sld xmlns:a="http://schemas.openxmlformats.org/drawingml/2006/main" xmlns:r="http://schemas.openxmlformats.org/officeDocument/2006/relationships" xmlns:p="http://schemas.openxmlformats.org/presentationml/2006/main">
-  <p:cSld name="Slide 9">
-    <p:bg>
-      <p:bgPr>
-        <a:solidFill>
-          <a:srgbClr val="241C3B"/>
-        </a:solidFill>
-      </p:bgPr>
-    </p:bg>
-    <p:spTree>
-      <p:nvGrpSpPr>
-        <p:cNvPr id="1" name=""/>
-        <p:cNvGrpSpPr/>
-        <p:nvPr/>
-      </p:nvGrpSpPr>
-      <p:grpSpPr>
-        <a:xfrm>
-          <a:off x="0" y="0"/>
-          <a:ext cx="0" cy="0"/>
-          <a:chOff x="0" y="0"/>
-          <a:chExt cx="0" cy="0"/>
-        </a:xfrm>
-      </p:grpSpPr>
-      <p:sp>
-        <p:nvSpPr>
-          <p:cNvPr id="2" name="Shape 0"/>
-          <p:cNvSpPr/>
-          <p:nvPr/>
-        </p:nvSpPr>
-        <p:spPr>
-          <a:xfrm>
-            <a:off x="-1463040" y="-1737360"/>
-            <a:ext cx="4937760" cy="4937760"/>
-          </a:xfrm>
-          <a:prstGeom prst="ellipse">
-            <a:avLst/>
-          </a:prstGeom>
-          <a:solidFill>
-            <a:srgbClr val="7C5CE0">
-              <a:alpha val="22000"/>
-            </a:srgbClr>
-          </a:solidFill>
-          <a:ln w="12700">
-            <a:solidFill>
-              <a:srgbClr val="241C3B">
-                <a:alpha val="0"/>
-              </a:srgbClr>
-            </a:solidFill>
-            <a:prstDash val="solid"/>
-          </a:ln>
-        </p:spPr>
-        <p:txBody>
-          <a:bodyPr/>
-          <a:p/>
-        </p:txBody>
-      </p:sp>
-      <p:sp>
-        <p:nvSpPr>
-          <p:cNvPr id="3" name="Shape 1"/>
-          <p:cNvSpPr/>
-          <p:nvPr/>
-        </p:nvSpPr>
-        <p:spPr>
-          <a:xfrm>
-            <a:off x="6583680" y="3017520"/>
-            <a:ext cx="3840480" cy="3840480"/>
-          </a:xfrm>
-          <a:prstGeom prst="ellipse">
-            <a:avLst/>
-          </a:prstGeom>
-          <a:solidFill>
-            <a:srgbClr val="F2A8CE">
-              <a:alpha val="14000"/>
-            </a:srgbClr>
-          </a:solidFill>
-          <a:ln w="12700">
-            <a:solidFill>
-              <a:srgbClr val="241C3B">
-                <a:alpha val="0"/>
-              </a:srgbClr>
-            </a:solidFill>
-            <a:prstDash val="solid"/>
-          </a:ln>
-        </p:spPr>
-        <p:txBody>
-          <a:bodyPr/>
-          <a:p/>
-        </p:txBody>
-      </p:sp>
-      <p:sp>
-        <p:nvSpPr>
-          <p:cNvPr id="4" name="Shape 2"/>
-          <p:cNvSpPr/>
-          <p:nvPr/>
-        </p:nvSpPr>
-        <p:spPr>
-          <a:xfrm>
-            <a:off x="685800" y="1143000"/>
-            <a:ext cx="822960" cy="164592"/>
-          </a:xfrm>
-          <a:prstGeom prst="roundRect">
-            <a:avLst>
-              <a:gd name="adj" fmla="val 50000"/>
-            </a:avLst>
-          </a:prstGeom>
-          <a:solidFill>
-            <a:srgbClr val="7C5CE0"/>
-          </a:solidFill>
-          <a:ln w="12700">
-            <a:solidFill>
-              <a:srgbClr val="7C5CE0"/>
-            </a:solidFill>
-            <a:prstDash val="solid"/>
-          </a:ln>
-        </p:spPr>
-        <p:txBody>
-          <a:bodyPr/>
-          <a:p/>
-        </p:txBody>
-      </p:sp>
-      <p:sp>
-        <p:nvSpPr>
-          <p:cNvPr id="5" name="Text 3"/>
-          <p:cNvSpPr/>
-          <p:nvPr/>
-        </p:nvSpPr>
-        <p:spPr>
-          <a:xfrm>
-            <a:off x="640080" y="1828800"/>
-            <a:ext cx="7498080" cy="1280160"/>
-          </a:xfrm>
-          <a:prstGeom prst="rect">
-            <a:avLst/>
-          </a:prstGeom>
-          <a:noFill/>
-          <a:ln/>
-        </p:spPr>
-        <p:txBody>
-          <a:bodyPr wrap="square" rtlCol="0" anchor="ctr"/>
-          <a:lstStyle/>
-          <a:p>
-            <a:pPr indent="0" marL="0">
-              <a:lnSpc>
-                <a:spcPct val="105000"/>
-              </a:lnSpc>
-              <a:buNone/>
-            </a:pPr>
-            <a:r>
-              <a:rPr lang="en-US" sz="3600" b="1" dirty="0">
-                <a:solidFill>
-                  <a:srgbClr val="FFFFFF"/>
-                </a:solidFill>
-                <a:latin typeface="Trebuchet MS" pitchFamily="34" charset="0"/>
-                <a:ea typeface="Trebuchet MS" pitchFamily="34" charset="-122"/>
-                <a:cs typeface="Trebuchet MS" pitchFamily="34" charset="-120"/>
-              </a:rPr>
-              <a:t>Vardagen ska inte kräva att du är någon annan.</a:t>
-            </a:r>
-            <a:endParaRPr lang="en-US" sz="3600" dirty="0"/>
-          </a:p>
-        </p:txBody>
-      </p:sp>
-      <p:sp>
-        <p:nvSpPr>
-          <p:cNvPr id="6" name="Text 4"/>
-          <p:cNvSpPr/>
-          <p:nvPr/>
-        </p:nvSpPr>
-        <p:spPr>
-          <a:xfrm>
-            <a:off x="640080" y="4023360"/>
-            <a:ext cx="7498080" cy="365760"/>
-          </a:xfrm>
-          <a:prstGeom prst="rect">
-            <a:avLst/>
-          </a:prstGeom>
-          <a:noFill/>
-          <a:ln/>
-        </p:spPr>
-        <p:txBody>
-          <a:bodyPr wrap="square" rtlCol="0" anchor="ctr"/>
-          <a:lstStyle/>
-          <a:p>
-            <a:pPr indent="0" marL="0">
-              <a:buNone/>
-            </a:pPr>
-            <a:r>
-              <a:rPr lang="en-US" sz="1500" dirty="0">
-                <a:solidFill>
-                  <a:srgbClr val="A98CF0"/>
-                </a:solidFill>
-                <a:latin typeface="Calibri" pitchFamily="34" charset="0"/>
-                <a:ea typeface="Calibri" pitchFamily="34" charset="-122"/>
-                <a:cs typeface="Calibri" pitchFamily="34" charset="-120"/>
-              </a:rPr>
-              <a:t>MyFlove  ·  myflove.lovable.app  ·  [KONTAKT – fyll i]</a:t>
-            </a:r>
-            <a:endParaRPr lang="en-US" sz="1500" dirty="0"/>
           </a:p>
         </p:txBody>
       </p:sp>

--- a/public/pitch/MyFlove_Pitchdeck_3.4.pptx
+++ b/public/pitch/MyFlove_Pitchdeck_3.4.pptx
@@ -2083,8 +2083,8 @@
         </p:nvSpPr>
         <p:spPr>
           <a:xfrm>
-            <a:off x="-1280160" y="3200400"/>
-            <a:ext cx="3200400" cy="3200400"/>
+            <a:off x="-1965960" y="3931920"/>
+            <a:ext cx="2743200" cy="2743200"/>
           </a:xfrm>
           <a:prstGeom prst="ellipse">
             <a:avLst/>
@@ -2194,8 +2194,8 @@
         </p:nvSpPr>
         <p:spPr>
           <a:xfrm>
-            <a:off x="640080" y="2011680"/>
-            <a:ext cx="2423160" cy="1280160"/>
+            <a:off x="640080" y="1737360"/>
+            <a:ext cx="2423160" cy="1188720"/>
           </a:xfrm>
           <a:prstGeom prst="roundRect">
             <a:avLst/>
@@ -2238,7 +2238,7 @@
         </p:nvSpPr>
         <p:spPr>
           <a:xfrm>
-            <a:off x="868680" y="2194560"/>
+            <a:off x="868680" y="1874520"/>
             <a:ext cx="411480" cy="91440"/>
           </a:xfrm>
           <a:prstGeom prst="roundRect">
@@ -2282,7 +2282,7 @@
         </p:nvSpPr>
         <p:spPr>
           <a:xfrm>
-            <a:off x="868680" y="2346960"/>
+            <a:off x="868680" y="2011680"/>
             <a:ext cx="1965960" cy="320040"/>
           </a:xfrm>
           <a:prstGeom prst="rect">
@@ -2316,7 +2316,7 @@
         </p:nvSpPr>
         <p:spPr>
           <a:xfrm>
-            <a:off x="868680" y="2667000"/>
+            <a:off x="868680" y="2331720"/>
             <a:ext cx="1965960" cy="220000"/>
           </a:xfrm>
           <a:prstGeom prst="rect">
@@ -2350,7 +2350,7 @@
         </p:nvSpPr>
         <p:spPr>
           <a:xfrm>
-            <a:off x="868680" y="2861680"/>
+            <a:off x="868680" y="2514600"/>
             <a:ext cx="1965960" cy="380000"/>
           </a:xfrm>
           <a:prstGeom prst="rect">
@@ -2384,8 +2384,8 @@
         </p:nvSpPr>
         <p:spPr>
           <a:xfrm>
-            <a:off x="3337560" y="2011680"/>
-            <a:ext cx="2423160" cy="1280160"/>
+            <a:off x="3337560" y="1737360"/>
+            <a:ext cx="2423160" cy="1188720"/>
           </a:xfrm>
           <a:prstGeom prst="roundRect">
             <a:avLst/>
@@ -2428,7 +2428,7 @@
         </p:nvSpPr>
         <p:spPr>
           <a:xfrm>
-            <a:off x="3566160" y="2194560"/>
+            <a:off x="3566160" y="1874520"/>
             <a:ext cx="411480" cy="91440"/>
           </a:xfrm>
           <a:prstGeom prst="roundRect">
@@ -2472,7 +2472,7 @@
         </p:nvSpPr>
         <p:spPr>
           <a:xfrm>
-            <a:off x="3566160" y="2346960"/>
+            <a:off x="3566160" y="2011680"/>
             <a:ext cx="1965960" cy="320040"/>
           </a:xfrm>
           <a:prstGeom prst="rect">
@@ -2506,7 +2506,7 @@
         </p:nvSpPr>
         <p:spPr>
           <a:xfrm>
-            <a:off x="3566160" y="2667000"/>
+            <a:off x="3566160" y="2331720"/>
             <a:ext cx="1965960" cy="220000"/>
           </a:xfrm>
           <a:prstGeom prst="rect">
@@ -2540,7 +2540,7 @@
         </p:nvSpPr>
         <p:spPr>
           <a:xfrm>
-            <a:off x="3566160" y="2861680"/>
+            <a:off x="3566160" y="2514600"/>
             <a:ext cx="1965960" cy="380000"/>
           </a:xfrm>
           <a:prstGeom prst="rect">
@@ -2574,8 +2574,8 @@
         </p:nvSpPr>
         <p:spPr>
           <a:xfrm>
-            <a:off x="6035040" y="2011680"/>
-            <a:ext cx="2423160" cy="1280160"/>
+            <a:off x="6035040" y="1737360"/>
+            <a:ext cx="2423160" cy="1188720"/>
           </a:xfrm>
           <a:prstGeom prst="roundRect">
             <a:avLst/>
@@ -2618,7 +2618,7 @@
         </p:nvSpPr>
         <p:spPr>
           <a:xfrm>
-            <a:off x="6263640" y="2194560"/>
+            <a:off x="6263640" y="1874520"/>
             <a:ext cx="411480" cy="91440"/>
           </a:xfrm>
           <a:prstGeom prst="roundRect">
@@ -2662,7 +2662,7 @@
         </p:nvSpPr>
         <p:spPr>
           <a:xfrm>
-            <a:off x="6263640" y="2346960"/>
+            <a:off x="6263640" y="2011680"/>
             <a:ext cx="1965960" cy="320040"/>
           </a:xfrm>
           <a:prstGeom prst="rect">
@@ -2696,7 +2696,7 @@
         </p:nvSpPr>
         <p:spPr>
           <a:xfrm>
-            <a:off x="6263640" y="2667000"/>
+            <a:off x="6263640" y="2331720"/>
             <a:ext cx="1965960" cy="220000"/>
           </a:xfrm>
           <a:prstGeom prst="rect">
@@ -2730,7 +2730,7 @@
         </p:nvSpPr>
         <p:spPr>
           <a:xfrm>
-            <a:off x="6263640" y="2861680"/>
+            <a:off x="6263640" y="2514600"/>
             <a:ext cx="1965960" cy="380000"/>
           </a:xfrm>
           <a:prstGeom prst="rect">
@@ -2764,8 +2764,8 @@
         </p:nvSpPr>
         <p:spPr>
           <a:xfrm>
-            <a:off x="640080" y="3383280"/>
-            <a:ext cx="2423160" cy="1280160"/>
+            <a:off x="640080" y="2971800"/>
+            <a:ext cx="2423160" cy="1188720"/>
           </a:xfrm>
           <a:prstGeom prst="roundRect">
             <a:avLst/>
@@ -2808,7 +2808,7 @@
         </p:nvSpPr>
         <p:spPr>
           <a:xfrm>
-            <a:off x="868680" y="3566160"/>
+            <a:off x="868680" y="3108960"/>
             <a:ext cx="411480" cy="91440"/>
           </a:xfrm>
           <a:prstGeom prst="roundRect">
@@ -2852,7 +2852,7 @@
         </p:nvSpPr>
         <p:spPr>
           <a:xfrm>
-            <a:off x="868680" y="3718560"/>
+            <a:off x="868680" y="3246120"/>
             <a:ext cx="1965960" cy="320040"/>
           </a:xfrm>
           <a:prstGeom prst="rect">
@@ -2886,7 +2886,7 @@
         </p:nvSpPr>
         <p:spPr>
           <a:xfrm>
-            <a:off x="868680" y="4038600"/>
+            <a:off x="868680" y="3566160"/>
             <a:ext cx="1965960" cy="220000"/>
           </a:xfrm>
           <a:prstGeom prst="rect">
@@ -2920,7 +2920,7 @@
         </p:nvSpPr>
         <p:spPr>
           <a:xfrm>
-            <a:off x="868680" y="4233280"/>
+            <a:off x="868680" y="3749040"/>
             <a:ext cx="1965960" cy="380000"/>
           </a:xfrm>
           <a:prstGeom prst="rect">
@@ -2954,8 +2954,8 @@
         </p:nvSpPr>
         <p:spPr>
           <a:xfrm>
-            <a:off x="3337560" y="3383280"/>
-            <a:ext cx="2423160" cy="1280160"/>
+            <a:off x="3337560" y="2971800"/>
+            <a:ext cx="2423160" cy="1188720"/>
           </a:xfrm>
           <a:prstGeom prst="roundRect">
             <a:avLst/>
@@ -2998,7 +2998,7 @@
         </p:nvSpPr>
         <p:spPr>
           <a:xfrm>
-            <a:off x="3566160" y="3566160"/>
+            <a:off x="3566160" y="3108960"/>
             <a:ext cx="411480" cy="91440"/>
           </a:xfrm>
           <a:prstGeom prst="roundRect">
@@ -3042,7 +3042,7 @@
         </p:nvSpPr>
         <p:spPr>
           <a:xfrm>
-            <a:off x="3566160" y="3718560"/>
+            <a:off x="3566160" y="3246120"/>
             <a:ext cx="1965960" cy="320040"/>
           </a:xfrm>
           <a:prstGeom prst="rect">
@@ -3076,7 +3076,7 @@
         </p:nvSpPr>
         <p:spPr>
           <a:xfrm>
-            <a:off x="3566160" y="4038600"/>
+            <a:off x="3566160" y="3566160"/>
             <a:ext cx="1965960" cy="220000"/>
           </a:xfrm>
           <a:prstGeom prst="rect">
@@ -3110,7 +3110,7 @@
         </p:nvSpPr>
         <p:spPr>
           <a:xfrm>
-            <a:off x="3566160" y="4233280"/>
+            <a:off x="3566160" y="3749040"/>
             <a:ext cx="1965960" cy="380000"/>
           </a:xfrm>
           <a:prstGeom prst="rect">
@@ -3144,8 +3144,8 @@
         </p:nvSpPr>
         <p:spPr>
           <a:xfrm>
-            <a:off x="6035040" y="3383280"/>
-            <a:ext cx="2423160" cy="1280160"/>
+            <a:off x="6035040" y="2971800"/>
+            <a:ext cx="2423160" cy="1188720"/>
           </a:xfrm>
           <a:prstGeom prst="roundRect">
             <a:avLst/>
@@ -3188,7 +3188,7 @@
         </p:nvSpPr>
         <p:spPr>
           <a:xfrm>
-            <a:off x="6263640" y="3566160"/>
+            <a:off x="6263640" y="3108960"/>
             <a:ext cx="411480" cy="91440"/>
           </a:xfrm>
           <a:prstGeom prst="roundRect">
@@ -3232,7 +3232,7 @@
         </p:nvSpPr>
         <p:spPr>
           <a:xfrm>
-            <a:off x="6263640" y="3718560"/>
+            <a:off x="6263640" y="3246120"/>
             <a:ext cx="1965960" cy="320040"/>
           </a:xfrm>
           <a:prstGeom prst="rect">
@@ -3266,7 +3266,7 @@
         </p:nvSpPr>
         <p:spPr>
           <a:xfrm>
-            <a:off x="6263640" y="4038600"/>
+            <a:off x="6263640" y="3566160"/>
             <a:ext cx="1965960" cy="220000"/>
           </a:xfrm>
           <a:prstGeom prst="rect">
@@ -3300,7 +3300,7 @@
         </p:nvSpPr>
         <p:spPr>
           <a:xfrm>
-            <a:off x="6263640" y="4233280"/>
+            <a:off x="6263640" y="3749040"/>
             <a:ext cx="1965960" cy="380000"/>
           </a:xfrm>
           <a:prstGeom prst="rect">
@@ -3334,7 +3334,7 @@
         </p:nvSpPr>
         <p:spPr>
           <a:xfrm>
-            <a:off x="640080" y="4343400"/>
+            <a:off x="640080" y="4297680"/>
             <a:ext cx="7863840" cy="260000"/>
           </a:xfrm>
           <a:prstGeom prst="rect">
@@ -3368,7 +3368,7 @@
         </p:nvSpPr>
         <p:spPr>
           <a:xfrm>
-            <a:off x="640080" y="4526280"/>
+            <a:off x="640080" y="4480560"/>
             <a:ext cx="7863840" cy="300000"/>
           </a:xfrm>
           <a:prstGeom prst="rect">
@@ -3402,7 +3402,7 @@
         </p:nvSpPr>
         <p:spPr>
           <a:xfrm>
-            <a:off x="640080" y="4785360"/>
+            <a:off x="640080" y="4754880"/>
             <a:ext cx="7863840" cy="260000"/>
           </a:xfrm>
           <a:prstGeom prst="rect">
